--- a/notes/06-struct-malloc.pptx
+++ b/notes/06-struct-malloc.pptx
@@ -20,14 +20,13 @@
     <p:sldId id="312" r:id="rId17"/>
     <p:sldId id="304" r:id="rId18"/>
     <p:sldId id="313" r:id="rId19"/>
-    <p:sldId id="300" r:id="rId20"/>
-    <p:sldId id="314" r:id="rId21"/>
-    <p:sldId id="302" r:id="rId22"/>
-    <p:sldId id="306" r:id="rId23"/>
-    <p:sldId id="308" r:id="rId24"/>
-    <p:sldId id="309" r:id="rId25"/>
-    <p:sldId id="310" r:id="rId26"/>
-    <p:sldId id="315" r:id="rId27"/>
+    <p:sldId id="314" r:id="rId20"/>
+    <p:sldId id="302" r:id="rId21"/>
+    <p:sldId id="306" r:id="rId22"/>
+    <p:sldId id="308" r:id="rId23"/>
+    <p:sldId id="309" r:id="rId24"/>
+    <p:sldId id="310" r:id="rId25"/>
+    <p:sldId id="315" r:id="rId26"/>
   </p:sldIdLst>
   <p:sldSz cx="9144000" cy="6858000" type="screen4x3"/>
   <p:notesSz cx="6858000" cy="9144000"/>
@@ -148,7 +147,7 @@
 <file path=ppt/revisionInfo.xml><?xml version="1.0" encoding="utf-8"?>
 <p1510:revInfo xmlns:a="http://schemas.openxmlformats.org/drawingml/2006/main" xmlns:r="http://schemas.openxmlformats.org/officeDocument/2006/relationships" xmlns:p1510="http://schemas.microsoft.com/office/powerpoint/2015/10/main">
   <p1510:revLst>
-    <p1510:client id="{56412FC5-A043-BC40-A6BD-9201E3518160}" v="163" dt="2026-02-11T17:59:41.480"/>
+    <p1510:client id="{B40D29FE-EAFE-DA45-8968-B49E0D5829D1}" v="79" dt="2026-09-30T21:45:23.470"/>
   </p1510:revLst>
 </p1510:revInfo>
 </file>
@@ -332,7 +331,7 @@
           <a:p>
             <a:fld id="{6F998A3A-B3F1-C640-8709-1356562CC12B}" type="datetimeFigureOut">
               <a:rPr lang="en-US" smtClean="0"/>
-              <a:t>2/11/26</a:t>
+              <a:t>9/30/26</a:t>
             </a:fld>
             <a:endParaRPr lang="en-US"/>
           </a:p>
@@ -500,7 +499,7 @@
           <a:p>
             <a:fld id="{6F998A3A-B3F1-C640-8709-1356562CC12B}" type="datetimeFigureOut">
               <a:rPr lang="en-US" smtClean="0"/>
-              <a:t>2/11/26</a:t>
+              <a:t>9/30/26</a:t>
             </a:fld>
             <a:endParaRPr lang="en-US"/>
           </a:p>
@@ -678,7 +677,7 @@
           <a:p>
             <a:fld id="{6F998A3A-B3F1-C640-8709-1356562CC12B}" type="datetimeFigureOut">
               <a:rPr lang="en-US" smtClean="0"/>
-              <a:t>2/11/26</a:t>
+              <a:t>9/30/26</a:t>
             </a:fld>
             <a:endParaRPr lang="en-US"/>
           </a:p>
@@ -846,7 +845,7 @@
           <a:p>
             <a:fld id="{6F998A3A-B3F1-C640-8709-1356562CC12B}" type="datetimeFigureOut">
               <a:rPr lang="en-US" smtClean="0"/>
-              <a:t>2/11/26</a:t>
+              <a:t>9/30/26</a:t>
             </a:fld>
             <a:endParaRPr lang="en-US"/>
           </a:p>
@@ -1091,7 +1090,7 @@
           <a:p>
             <a:fld id="{6F998A3A-B3F1-C640-8709-1356562CC12B}" type="datetimeFigureOut">
               <a:rPr lang="en-US" smtClean="0"/>
-              <a:t>2/11/26</a:t>
+              <a:t>9/30/26</a:t>
             </a:fld>
             <a:endParaRPr lang="en-US"/>
           </a:p>
@@ -1376,7 +1375,7 @@
           <a:p>
             <a:fld id="{6F998A3A-B3F1-C640-8709-1356562CC12B}" type="datetimeFigureOut">
               <a:rPr lang="en-US" smtClean="0"/>
-              <a:t>2/11/26</a:t>
+              <a:t>9/30/26</a:t>
             </a:fld>
             <a:endParaRPr lang="en-US"/>
           </a:p>
@@ -1795,7 +1794,7 @@
           <a:p>
             <a:fld id="{6F998A3A-B3F1-C640-8709-1356562CC12B}" type="datetimeFigureOut">
               <a:rPr lang="en-US" smtClean="0"/>
-              <a:t>2/11/26</a:t>
+              <a:t>9/30/26</a:t>
             </a:fld>
             <a:endParaRPr lang="en-US"/>
           </a:p>
@@ -1912,7 +1911,7 @@
           <a:p>
             <a:fld id="{6F998A3A-B3F1-C640-8709-1356562CC12B}" type="datetimeFigureOut">
               <a:rPr lang="en-US" smtClean="0"/>
-              <a:t>2/11/26</a:t>
+              <a:t>9/30/26</a:t>
             </a:fld>
             <a:endParaRPr lang="en-US"/>
           </a:p>
@@ -2007,7 +2006,7 @@
           <a:p>
             <a:fld id="{6F998A3A-B3F1-C640-8709-1356562CC12B}" type="datetimeFigureOut">
               <a:rPr lang="en-US" smtClean="0"/>
-              <a:t>2/11/26</a:t>
+              <a:t>9/30/26</a:t>
             </a:fld>
             <a:endParaRPr lang="en-US"/>
           </a:p>
@@ -2282,7 +2281,7 @@
           <a:p>
             <a:fld id="{6F998A3A-B3F1-C640-8709-1356562CC12B}" type="datetimeFigureOut">
               <a:rPr lang="en-US" smtClean="0"/>
-              <a:t>2/11/26</a:t>
+              <a:t>9/30/26</a:t>
             </a:fld>
             <a:endParaRPr lang="en-US"/>
           </a:p>
@@ -2534,7 +2533,7 @@
           <a:p>
             <a:fld id="{6F998A3A-B3F1-C640-8709-1356562CC12B}" type="datetimeFigureOut">
               <a:rPr lang="en-US" smtClean="0"/>
-              <a:t>2/11/26</a:t>
+              <a:t>9/30/26</a:t>
             </a:fld>
             <a:endParaRPr lang="en-US"/>
           </a:p>
@@ -2745,7 +2744,7 @@
           <a:p>
             <a:fld id="{6F998A3A-B3F1-C640-8709-1356562CC12B}" type="datetimeFigureOut">
               <a:rPr lang="en-US" smtClean="0"/>
-              <a:t>2/11/26</a:t>
+              <a:t>9/30/26</a:t>
             </a:fld>
             <a:endParaRPr lang="en-US"/>
           </a:p>
@@ -3960,8 +3959,8 @@
           </a:p>
         </p:txBody>
       </p:sp>
-      <mc:AlternateContent xmlns:mc="http://schemas.openxmlformats.org/markup-compatibility/2006">
-        <mc:Choice xmlns:a14="http://schemas.microsoft.com/office/drawing/2010/main" Requires="a14">
+      <mc:AlternateContent xmlns:mc="http://schemas.openxmlformats.org/markup-compatibility/2006" xmlns:a14="http://schemas.microsoft.com/office/drawing/2010/main">
+        <mc:Choice Requires="a14">
           <p:sp>
             <p:nvSpPr>
               <p:cNvPr id="8" name="TextBox 7">
@@ -4013,7 +4012,7 @@
             </p:txBody>
           </p:sp>
         </mc:Choice>
-        <mc:Fallback>
+        <mc:Fallback xmlns="">
           <p:sp>
             <p:nvSpPr>
               <p:cNvPr id="8" name="TextBox 7">
@@ -4058,8 +4057,8 @@
           </p:sp>
         </mc:Fallback>
       </mc:AlternateContent>
-      <mc:AlternateContent xmlns:mc="http://schemas.openxmlformats.org/markup-compatibility/2006">
-        <mc:Choice xmlns:a14="http://schemas.microsoft.com/office/drawing/2010/main" Requires="a14">
+      <mc:AlternateContent xmlns:mc="http://schemas.openxmlformats.org/markup-compatibility/2006" xmlns:a14="http://schemas.microsoft.com/office/drawing/2010/main">
+        <mc:Choice Requires="a14">
           <p:sp>
             <p:nvSpPr>
               <p:cNvPr id="9" name="TextBox 8">
@@ -4111,7 +4110,7 @@
             </p:txBody>
           </p:sp>
         </mc:Choice>
-        <mc:Fallback>
+        <mc:Fallback xmlns="">
           <p:sp>
             <p:nvSpPr>
               <p:cNvPr id="9" name="TextBox 8">
@@ -4210,7 +4209,7 @@
           <a:p>
             <a:r>
               <a:rPr kumimoji="1" lang="en-US" altLang="zh-CN" dirty="0"/>
-              <a:t>Recall memory allocation for </a:t>
+              <a:t>Memory allocation for </a:t>
             </a:r>
             <a:br>
               <a:rPr kumimoji="1" lang="en-US" altLang="zh-CN" dirty="0"/>
@@ -7235,7 +7234,7 @@
         <p:spPr>
           <a:xfrm>
             <a:off x="652756" y="1254612"/>
-            <a:ext cx="7396911" cy="5016758"/>
+            <a:ext cx="8120541" cy="5016758"/>
           </a:xfrm>
           <a:prstGeom prst="rect">
             <a:avLst/>
@@ -7255,7 +7254,7 @@
                 <a:latin typeface="Consolas"/>
                 <a:cs typeface="Consolas"/>
               </a:rPr>
-              <a:t>// insert </a:t>
+              <a:t>// insert a new node with </a:t>
             </a:r>
             <a:r>
               <a:rPr lang="en-US" altLang="zh-CN" dirty="0" err="1">
@@ -7287,369 +7286,18 @@
                 <a:latin typeface="Consolas"/>
                 <a:cs typeface="Consolas"/>
               </a:rPr>
-              <a:t>// returns new head</a:t>
-            </a:r>
-          </a:p>
-          <a:p>
-            <a:r>
-              <a:rPr lang="en-US" altLang="zh-CN" sz="2000" dirty="0">
+              <a:t>// modify head pointer pointed to by </a:t>
+            </a:r>
+            <a:r>
+              <a:rPr lang="en-US" altLang="zh-CN" dirty="0" err="1">
+                <a:solidFill>
+                  <a:srgbClr val="0000FF"/>
+                </a:solidFill>
                 <a:latin typeface="Consolas"/>
                 <a:cs typeface="Consolas"/>
               </a:rPr>
-              <a:t>node *</a:t>
-            </a:r>
-            <a:r>
-              <a:rPr lang="en-US" altLang="zh-CN" sz="2000" dirty="0" err="1">
-                <a:latin typeface="Consolas"/>
-                <a:cs typeface="Consolas"/>
-              </a:rPr>
-              <a:t>insert_front</a:t>
-            </a:r>
-            <a:r>
-              <a:rPr lang="en-US" altLang="zh-CN" sz="2000" dirty="0">
-                <a:latin typeface="Consolas"/>
-                <a:cs typeface="Consolas"/>
-              </a:rPr>
-              <a:t>(node *</a:t>
-            </a:r>
-            <a:r>
-              <a:rPr lang="en-US" altLang="zh-CN" sz="2000" dirty="0" err="1">
-                <a:latin typeface="Consolas"/>
-                <a:cs typeface="Consolas"/>
-              </a:rPr>
               <a:t>headp</a:t>
             </a:r>
-            <a:r>
-              <a:rPr lang="en-US" altLang="zh-CN" sz="2000" dirty="0">
-                <a:latin typeface="Consolas"/>
-                <a:cs typeface="Consolas"/>
-              </a:rPr>
-              <a:t>, int </a:t>
-            </a:r>
-            <a:r>
-              <a:rPr lang="en-US" altLang="zh-CN" sz="2000" dirty="0" err="1">
-                <a:latin typeface="Consolas"/>
-                <a:cs typeface="Consolas"/>
-              </a:rPr>
-              <a:t>val</a:t>
-            </a:r>
-            <a:r>
-              <a:rPr lang="en-US" altLang="zh-CN" sz="2000" dirty="0">
-                <a:latin typeface="Consolas"/>
-                <a:cs typeface="Consolas"/>
-              </a:rPr>
-              <a:t>) {</a:t>
-            </a:r>
-          </a:p>
-          <a:p>
-            <a:r>
-              <a:rPr lang="en-US" altLang="zh-CN" sz="2000" b="1" dirty="0">
-                <a:latin typeface="Consolas"/>
-                <a:cs typeface="Consolas"/>
-              </a:rPr>
-              <a:t> </a:t>
-            </a:r>
-          </a:p>
-          <a:p>
-            <a:endParaRPr lang="en-US" altLang="zh-CN" sz="2000" dirty="0">
-              <a:latin typeface="Consolas"/>
-              <a:cs typeface="Consolas"/>
-            </a:endParaRPr>
-          </a:p>
-          <a:p>
-            <a:endParaRPr lang="en-US" altLang="zh-CN" sz="2000" dirty="0">
-              <a:latin typeface="Consolas"/>
-              <a:cs typeface="Consolas"/>
-            </a:endParaRPr>
-          </a:p>
-          <a:p>
-            <a:r>
-              <a:rPr lang="en-US" altLang="zh-CN" sz="2000" dirty="0">
-                <a:latin typeface="Consolas"/>
-                <a:cs typeface="Consolas"/>
-              </a:rPr>
-              <a:t>}</a:t>
-            </a:r>
-          </a:p>
-          <a:p>
-            <a:endParaRPr lang="en-US" altLang="zh-CN" sz="2000" dirty="0">
-              <a:latin typeface="Consolas"/>
-              <a:cs typeface="Consolas"/>
-            </a:endParaRPr>
-          </a:p>
-          <a:p>
-            <a:endParaRPr lang="en-US" altLang="zh-CN" sz="2000" dirty="0">
-              <a:latin typeface="Consolas"/>
-              <a:cs typeface="Consolas"/>
-            </a:endParaRPr>
-          </a:p>
-          <a:p>
-            <a:endParaRPr lang="en-US" altLang="zh-CN" sz="2000" dirty="0">
-              <a:latin typeface="Consolas"/>
-              <a:cs typeface="Consolas"/>
-            </a:endParaRPr>
-          </a:p>
-          <a:p>
-            <a:r>
-              <a:rPr lang="en-US" altLang="zh-CN" sz="2000" dirty="0" err="1">
-                <a:latin typeface="Consolas"/>
-                <a:cs typeface="Consolas"/>
-              </a:rPr>
-              <a:t>int</a:t>
-            </a:r>
-            <a:r>
-              <a:rPr lang="en-US" altLang="zh-CN" sz="2000" dirty="0">
-                <a:latin typeface="Consolas"/>
-                <a:cs typeface="Consolas"/>
-              </a:rPr>
-              <a:t> main() {</a:t>
-            </a:r>
-          </a:p>
-          <a:p>
-            <a:r>
-              <a:rPr lang="en-US" altLang="zh-CN" sz="2000" dirty="0">
-                <a:latin typeface="Consolas"/>
-                <a:cs typeface="Consolas"/>
-              </a:rPr>
-              <a:t>    node *</a:t>
-            </a:r>
-            <a:r>
-              <a:rPr lang="en-US" altLang="zh-CN" sz="2000" dirty="0" err="1">
-                <a:latin typeface="Consolas"/>
-                <a:cs typeface="Consolas"/>
-              </a:rPr>
-              <a:t>headp</a:t>
-            </a:r>
-            <a:r>
-              <a:rPr lang="en-US" altLang="zh-CN" sz="2000" dirty="0">
-                <a:latin typeface="Consolas"/>
-                <a:cs typeface="Consolas"/>
-              </a:rPr>
-              <a:t> = NULL;</a:t>
-            </a:r>
-          </a:p>
-          <a:p>
-            <a:pPr lvl="1"/>
-            <a:r>
-              <a:rPr lang="en-US" altLang="zh-CN" sz="2000" dirty="0">
-                <a:latin typeface="Consolas"/>
-                <a:cs typeface="Consolas"/>
-              </a:rPr>
-              <a:t> for (</a:t>
-            </a:r>
-            <a:r>
-              <a:rPr lang="en-US" altLang="zh-CN" sz="2000" dirty="0" err="1">
-                <a:latin typeface="Consolas"/>
-                <a:cs typeface="Consolas"/>
-              </a:rPr>
-              <a:t>int</a:t>
-            </a:r>
-            <a:r>
-              <a:rPr lang="en-US" altLang="zh-CN" sz="2000" dirty="0">
-                <a:latin typeface="Consolas"/>
-                <a:cs typeface="Consolas"/>
-              </a:rPr>
-              <a:t> </a:t>
-            </a:r>
-            <a:r>
-              <a:rPr lang="en-US" altLang="zh-CN" sz="2000" dirty="0" err="1">
-                <a:latin typeface="Consolas"/>
-                <a:cs typeface="Consolas"/>
-              </a:rPr>
-              <a:t>i</a:t>
-            </a:r>
-            <a:r>
-              <a:rPr lang="en-US" altLang="zh-CN" sz="2000" dirty="0">
-                <a:latin typeface="Consolas"/>
-                <a:cs typeface="Consolas"/>
-              </a:rPr>
-              <a:t> = 0; </a:t>
-            </a:r>
-            <a:r>
-              <a:rPr lang="en-US" altLang="zh-CN" sz="2000" dirty="0" err="1">
-                <a:latin typeface="Consolas"/>
-                <a:cs typeface="Consolas"/>
-              </a:rPr>
-              <a:t>i</a:t>
-            </a:r>
-            <a:r>
-              <a:rPr lang="en-US" altLang="zh-CN" sz="2000" dirty="0">
-                <a:latin typeface="Consolas"/>
-                <a:cs typeface="Consolas"/>
-              </a:rPr>
-              <a:t> &lt; 3; </a:t>
-            </a:r>
-            <a:r>
-              <a:rPr lang="en-US" altLang="zh-CN" sz="2000" dirty="0" err="1">
-                <a:latin typeface="Consolas"/>
-                <a:cs typeface="Consolas"/>
-              </a:rPr>
-              <a:t>i</a:t>
-            </a:r>
-            <a:r>
-              <a:rPr lang="en-US" altLang="zh-CN" sz="2000" dirty="0">
-                <a:latin typeface="Consolas"/>
-                <a:cs typeface="Consolas"/>
-              </a:rPr>
-              <a:t>++) </a:t>
-            </a:r>
-          </a:p>
-          <a:p>
-            <a:pPr lvl="1"/>
-            <a:r>
-              <a:rPr lang="en-US" altLang="zh-CN" sz="2000" dirty="0">
-                <a:latin typeface="Consolas"/>
-                <a:cs typeface="Consolas"/>
-              </a:rPr>
-              <a:t>    </a:t>
-            </a:r>
-            <a:r>
-              <a:rPr lang="en-US" altLang="zh-CN" sz="2000" dirty="0" err="1">
-                <a:latin typeface="Consolas"/>
-                <a:cs typeface="Consolas"/>
-              </a:rPr>
-              <a:t>headp</a:t>
-            </a:r>
-            <a:r>
-              <a:rPr lang="en-US" altLang="zh-CN" sz="2000" dirty="0">
-                <a:latin typeface="Consolas"/>
-                <a:cs typeface="Consolas"/>
-              </a:rPr>
-              <a:t> = </a:t>
-            </a:r>
-            <a:r>
-              <a:rPr lang="en-US" altLang="zh-CN" sz="2000" dirty="0" err="1">
-                <a:latin typeface="Consolas"/>
-                <a:cs typeface="Consolas"/>
-              </a:rPr>
-              <a:t>insert_front</a:t>
-            </a:r>
-            <a:r>
-              <a:rPr lang="en-US" altLang="zh-CN" sz="2000" dirty="0">
-                <a:latin typeface="Consolas"/>
-                <a:cs typeface="Consolas"/>
-              </a:rPr>
-              <a:t>(</a:t>
-            </a:r>
-            <a:r>
-              <a:rPr lang="en-US" altLang="zh-CN" sz="2000" dirty="0" err="1">
-                <a:latin typeface="Consolas"/>
-                <a:cs typeface="Consolas"/>
-              </a:rPr>
-              <a:t>headp</a:t>
-            </a:r>
-            <a:r>
-              <a:rPr lang="en-US" altLang="zh-CN" sz="2000" dirty="0">
-                <a:latin typeface="Consolas"/>
-                <a:cs typeface="Consolas"/>
-              </a:rPr>
-              <a:t>, </a:t>
-            </a:r>
-            <a:r>
-              <a:rPr lang="en-US" altLang="zh-CN" sz="2000" dirty="0" err="1">
-                <a:latin typeface="Consolas"/>
-                <a:cs typeface="Consolas"/>
-              </a:rPr>
-              <a:t>i</a:t>
-            </a:r>
-            <a:r>
-              <a:rPr lang="en-US" altLang="zh-CN" sz="2000" dirty="0">
-                <a:latin typeface="Consolas"/>
-                <a:cs typeface="Consolas"/>
-              </a:rPr>
-              <a:t>);</a:t>
-            </a:r>
-          </a:p>
-          <a:p>
-            <a:r>
-              <a:rPr lang="en-US" altLang="zh-CN" sz="2000" dirty="0">
-                <a:latin typeface="Consolas"/>
-                <a:cs typeface="Consolas"/>
-              </a:rPr>
-              <a:t>}</a:t>
-            </a:r>
-          </a:p>
-          <a:p>
-            <a:endParaRPr lang="zh-CN" altLang="en-US" sz="2400" dirty="0">
-              <a:latin typeface="Consolas"/>
-              <a:cs typeface="Consolas"/>
-            </a:endParaRPr>
-          </a:p>
-        </p:txBody>
-      </p:sp>
-    </p:spTree>
-    <p:extLst>
-      <p:ext uri="{BB962C8B-B14F-4D97-AF65-F5344CB8AC3E}">
-        <p14:creationId xmlns:p14="http://schemas.microsoft.com/office/powerpoint/2010/main" val="3756723401"/>
-      </p:ext>
-    </p:extLst>
-  </p:cSld>
-  <p:clrMapOvr>
-    <a:masterClrMapping/>
-  </p:clrMapOvr>
-</p:sld>
-</file>
-
-<file path=ppt/slides/slide17.xml><?xml version="1.0" encoding="utf-8"?>
-<p:sld xmlns:a="http://schemas.openxmlformats.org/drawingml/2006/main" xmlns:r="http://schemas.openxmlformats.org/officeDocument/2006/relationships" xmlns:p="http://schemas.openxmlformats.org/presentationml/2006/main">
-  <p:cSld>
-    <p:spTree>
-      <p:nvGrpSpPr>
-        <p:cNvPr id="1" name=""/>
-        <p:cNvGrpSpPr/>
-        <p:nvPr/>
-      </p:nvGrpSpPr>
-      <p:grpSpPr>
-        <a:xfrm>
-          <a:off x="0" y="0"/>
-          <a:ext cx="0" cy="0"/>
-          <a:chOff x="0" y="0"/>
-          <a:chExt cx="0" cy="0"/>
-        </a:xfrm>
-      </p:grpSpPr>
-      <p:sp>
-        <p:nvSpPr>
-          <p:cNvPr id="2" name="Title 1"/>
-          <p:cNvSpPr>
-            <a:spLocks noGrp="1"/>
-          </p:cNvSpPr>
-          <p:nvPr>
-            <p:ph type="title"/>
-          </p:nvPr>
-        </p:nvSpPr>
-        <p:spPr/>
-        <p:txBody>
-          <a:bodyPr/>
-          <a:lstStyle/>
-          <a:p>
-            <a:r>
-              <a:rPr lang="en-US" dirty="0"/>
-              <a:t>Linked list in C: insertion</a:t>
-            </a:r>
-          </a:p>
-        </p:txBody>
-      </p:sp>
-      <p:sp>
-        <p:nvSpPr>
-          <p:cNvPr id="4" name="矩形 3"/>
-          <p:cNvSpPr/>
-          <p:nvPr/>
-        </p:nvSpPr>
-        <p:spPr>
-          <a:xfrm>
-            <a:off x="652756" y="1254612"/>
-            <a:ext cx="7396911" cy="5016758"/>
-          </a:xfrm>
-          <a:prstGeom prst="rect">
-            <a:avLst/>
-          </a:prstGeom>
-        </p:spPr>
-        <p:txBody>
-          <a:bodyPr wrap="square">
-            <a:spAutoFit/>
-          </a:bodyPr>
-          <a:lstStyle/>
-          <a:p>
             <a:r>
               <a:rPr lang="en-US" altLang="zh-CN" dirty="0">
                 <a:solidFill>
@@ -7658,39 +7306,7 @@
                 <a:latin typeface="Consolas"/>
                 <a:cs typeface="Consolas"/>
               </a:rPr>
-              <a:t>// insert </a:t>
-            </a:r>
-            <a:r>
-              <a:rPr lang="en-US" altLang="zh-CN" dirty="0" err="1">
-                <a:solidFill>
-                  <a:srgbClr val="0000FF"/>
-                </a:solidFill>
-                <a:latin typeface="Consolas"/>
-                <a:cs typeface="Consolas"/>
-              </a:rPr>
-              <a:t>val</a:t>
-            </a:r>
-            <a:r>
-              <a:rPr lang="en-US" altLang="zh-CN" dirty="0">
-                <a:solidFill>
-                  <a:srgbClr val="0000FF"/>
-                </a:solidFill>
-                <a:latin typeface="Consolas"/>
-                <a:cs typeface="Consolas"/>
-              </a:rPr>
-              <a:t> in the front of the linked list </a:t>
-            </a:r>
-          </a:p>
-          <a:p>
-            <a:r>
-              <a:rPr lang="en-US" altLang="zh-CN" dirty="0">
-                <a:solidFill>
-                  <a:srgbClr val="0000FF"/>
-                </a:solidFill>
-                <a:latin typeface="Consolas"/>
-                <a:cs typeface="Consolas"/>
-              </a:rPr>
-              <a:t>// returns new head</a:t>
+              <a:t> </a:t>
             </a:r>
           </a:p>
           <a:p>
@@ -8043,7 +7659,7 @@
                 </a:highlight>
                 <a:latin typeface="Consolas" panose="020B0609020204030204" pitchFamily="49" charset="0"/>
               </a:rPr>
-              <a:t>headdp</a:t>
+              <a:t>headp</a:t>
             </a:r>
             <a:r>
               <a:rPr lang="en-US" sz="2000" dirty="0">
@@ -8156,7 +7772,7 @@
 </p:sld>
 </file>
 
-<file path=ppt/slides/slide18.xml><?xml version="1.0" encoding="utf-8"?>
+<file path=ppt/slides/slide17.xml><?xml version="1.0" encoding="utf-8"?>
 <p:sld xmlns:a="http://schemas.openxmlformats.org/drawingml/2006/main" xmlns:r="http://schemas.openxmlformats.org/officeDocument/2006/relationships" xmlns:p="http://schemas.openxmlformats.org/presentationml/2006/main">
   <p:cSld>
     <p:spTree>
@@ -8181,8 +7797,8 @@
         </p:nvSpPr>
         <p:spPr>
           <a:xfrm>
-            <a:off x="3682893" y="3030604"/>
-            <a:ext cx="5097080" cy="2585323"/>
+            <a:off x="3682892" y="3030604"/>
+            <a:ext cx="5461107" cy="2585323"/>
           </a:xfrm>
           <a:prstGeom prst="rect">
             <a:avLst/>
@@ -8199,7 +7815,7 @@
               <a:rPr lang="en-US" dirty="0">
                 <a:latin typeface="Consolas" panose="020B0609020204030204" pitchFamily="49" charset="0"/>
               </a:rPr>
-              <a:t>node *</a:t>
+              <a:t>void </a:t>
             </a:r>
             <a:r>
               <a:rPr lang="en-US" dirty="0" err="1">
@@ -8211,7 +7827,19 @@
               <a:rPr lang="en-US" dirty="0">
                 <a:latin typeface="Consolas" panose="020B0609020204030204" pitchFamily="49" charset="0"/>
               </a:rPr>
-              <a:t>(node *head, int </a:t>
+              <a:t>(node **</a:t>
+            </a:r>
+            <a:r>
+              <a:rPr lang="en-US" dirty="0" err="1">
+                <a:latin typeface="Consolas" panose="020B0609020204030204" pitchFamily="49" charset="0"/>
+              </a:rPr>
+              <a:t>headp</a:t>
+            </a:r>
+            <a:r>
+              <a:rPr lang="en-US" dirty="0">
+                <a:latin typeface="Consolas" panose="020B0609020204030204" pitchFamily="49" charset="0"/>
+              </a:rPr>
+              <a:t>, int </a:t>
             </a:r>
             <a:r>
               <a:rPr lang="en-US" dirty="0" err="1">
@@ -8284,7 +7912,12 @@
             <p:ph type="title"/>
           </p:nvPr>
         </p:nvSpPr>
-        <p:spPr/>
+        <p:spPr>
+          <a:xfrm>
+            <a:off x="571144" y="168644"/>
+            <a:ext cx="8229600" cy="1143000"/>
+          </a:xfrm>
+        </p:spPr>
         <p:txBody>
           <a:bodyPr/>
           <a:lstStyle/>
@@ -8826,74 +8459,6 @@
           </a:p>
         </p:txBody>
       </p:sp>
-      <p:cxnSp>
-        <p:nvCxnSpPr>
-          <p:cNvPr id="37" name="直线箭头连接符 46"/>
-          <p:cNvCxnSpPr/>
-          <p:nvPr/>
-        </p:nvCxnSpPr>
-        <p:spPr>
-          <a:xfrm flipV="1">
-            <a:off x="2011020" y="2457635"/>
-            <a:ext cx="0" cy="373764"/>
-          </a:xfrm>
-          <a:prstGeom prst="straightConnector1">
-            <a:avLst/>
-          </a:prstGeom>
-          <a:ln>
-            <a:tailEnd type="arrow"/>
-          </a:ln>
-        </p:spPr>
-        <p:style>
-          <a:lnRef idx="2">
-            <a:schemeClr val="dk1"/>
-          </a:lnRef>
-          <a:fillRef idx="0">
-            <a:schemeClr val="dk1"/>
-          </a:fillRef>
-          <a:effectRef idx="1">
-            <a:schemeClr val="dk1"/>
-          </a:effectRef>
-          <a:fontRef idx="minor">
-            <a:schemeClr val="tx1"/>
-          </a:fontRef>
-        </p:style>
-      </p:cxnSp>
-      <p:sp>
-        <p:nvSpPr>
-          <p:cNvPr id="38" name="矩形 49"/>
-          <p:cNvSpPr/>
-          <p:nvPr/>
-        </p:nvSpPr>
-        <p:spPr>
-          <a:xfrm>
-            <a:off x="1637655" y="2821641"/>
-            <a:ext cx="723425" cy="369332"/>
-          </a:xfrm>
-          <a:prstGeom prst="rect">
-            <a:avLst/>
-          </a:prstGeom>
-        </p:spPr>
-        <p:txBody>
-          <a:bodyPr wrap="none">
-            <a:spAutoFit/>
-          </a:bodyPr>
-          <a:lstStyle/>
-          <a:p>
-            <a:r>
-              <a:rPr lang="en-US" altLang="zh-CN" b="1" dirty="0">
-                <a:latin typeface="Arial"/>
-                <a:cs typeface="Arial"/>
-              </a:rPr>
-              <a:t>head</a:t>
-            </a:r>
-            <a:endParaRPr lang="zh-CN" altLang="en-US" dirty="0">
-              <a:latin typeface="Arial"/>
-              <a:cs typeface="Arial"/>
-            </a:endParaRPr>
-          </a:p>
-        </p:txBody>
-      </p:sp>
       <p:sp>
         <p:nvSpPr>
           <p:cNvPr id="3" name="TextBox 2"/>
@@ -9006,7 +8571,7 @@
         </p:nvGrpSpPr>
         <p:grpSpPr>
           <a:xfrm>
-            <a:off x="2268290" y="4429193"/>
+            <a:off x="2136948" y="5066538"/>
             <a:ext cx="815648" cy="369332"/>
             <a:chOff x="2268290" y="4429193"/>
             <a:chExt cx="815648" cy="369332"/>
@@ -9170,7 +8735,19 @@
               <a:rPr lang="en-US" dirty="0">
                 <a:latin typeface="Consolas" panose="020B0609020204030204" pitchFamily="49" charset="0"/>
               </a:rPr>
-              <a:t>n-&gt;next = head;</a:t>
+              <a:t>n-&gt;next = *</a:t>
+            </a:r>
+            <a:r>
+              <a:rPr lang="en-US" dirty="0" err="1">
+                <a:latin typeface="Consolas" panose="020B0609020204030204" pitchFamily="49" charset="0"/>
+              </a:rPr>
+              <a:t>headp</a:t>
+            </a:r>
+            <a:r>
+              <a:rPr lang="en-US" dirty="0">
+                <a:latin typeface="Consolas" panose="020B0609020204030204" pitchFamily="49" charset="0"/>
+              </a:rPr>
+              <a:t>;</a:t>
             </a:r>
           </a:p>
         </p:txBody>
@@ -9183,8 +8760,8 @@
         </p:nvSpPr>
         <p:spPr>
           <a:xfrm>
-            <a:off x="2131962" y="2418914"/>
-            <a:ext cx="1016703" cy="2207260"/>
+            <a:off x="2064462" y="2399971"/>
+            <a:ext cx="888134" cy="2800539"/>
           </a:xfrm>
           <a:custGeom>
             <a:avLst/>
@@ -9471,7 +9048,19 @@
               <a:rPr lang="en-US" dirty="0">
                 <a:latin typeface="Consolas" panose="020B0609020204030204" pitchFamily="49" charset="0"/>
               </a:rPr>
-              <a:t>return n;</a:t>
+              <a:t>*</a:t>
+            </a:r>
+            <a:r>
+              <a:rPr lang="en-US" dirty="0" err="1">
+                <a:latin typeface="Consolas" panose="020B0609020204030204" pitchFamily="49" charset="0"/>
+              </a:rPr>
+              <a:t>headp</a:t>
+            </a:r>
+            <a:r>
+              <a:rPr lang="en-US" dirty="0">
+                <a:latin typeface="Consolas" panose="020B0609020204030204" pitchFamily="49" charset="0"/>
+              </a:rPr>
+              <a:t> = n;</a:t>
             </a:r>
           </a:p>
         </p:txBody>
@@ -9490,7 +9079,7 @@
         </p:nvSpPr>
         <p:spPr>
           <a:xfrm>
-            <a:off x="2289385" y="4441508"/>
+            <a:off x="2158043" y="5078853"/>
             <a:ext cx="448969" cy="369332"/>
           </a:xfrm>
           <a:prstGeom prst="rect">
@@ -9509,6 +9098,578 @@
               <a:t>val</a:t>
             </a:r>
             <a:endParaRPr lang="en-US" dirty="0"/>
+          </a:p>
+        </p:txBody>
+      </p:sp>
+      <p:sp>
+        <p:nvSpPr>
+          <p:cNvPr id="9" name="TextBox 8">
+            <a:extLst>
+              <a:ext uri="{FF2B5EF4-FFF2-40B4-BE49-F238E27FC236}">
+                <a16:creationId xmlns:a16="http://schemas.microsoft.com/office/drawing/2014/main" id="{E6C91641-A0EA-8E17-B047-702FDF2AC097}"/>
+              </a:ext>
+            </a:extLst>
+          </p:cNvPr>
+          <p:cNvSpPr txBox="1"/>
+          <p:nvPr/>
+        </p:nvSpPr>
+        <p:spPr>
+          <a:xfrm>
+            <a:off x="454192" y="4588831"/>
+            <a:ext cx="891591" cy="369332"/>
+          </a:xfrm>
+          <a:prstGeom prst="rect">
+            <a:avLst/>
+          </a:prstGeom>
+          <a:noFill/>
+        </p:spPr>
+        <p:txBody>
+          <a:bodyPr wrap="none" rtlCol="0">
+            <a:spAutoFit/>
+          </a:bodyPr>
+          <a:lstStyle/>
+          <a:p>
+            <a:r>
+              <a:rPr lang="en-US" dirty="0" err="1"/>
+              <a:t>headp</a:t>
+            </a:r>
+            <a:r>
+              <a:rPr lang="en-US" dirty="0"/>
+              <a:t>: </a:t>
+            </a:r>
+          </a:p>
+        </p:txBody>
+      </p:sp>
+      <p:sp>
+        <p:nvSpPr>
+          <p:cNvPr id="24" name="圆角矩形 5">
+            <a:extLst>
+              <a:ext uri="{FF2B5EF4-FFF2-40B4-BE49-F238E27FC236}">
+                <a16:creationId xmlns:a16="http://schemas.microsoft.com/office/drawing/2014/main" id="{63DA026D-DA17-803D-0D51-551B91313758}"/>
+              </a:ext>
+            </a:extLst>
+          </p:cNvPr>
+          <p:cNvSpPr/>
+          <p:nvPr/>
+        </p:nvSpPr>
+        <p:spPr>
+          <a:xfrm>
+            <a:off x="1253863" y="4598429"/>
+            <a:ext cx="302955" cy="326225"/>
+          </a:xfrm>
+          <a:prstGeom prst="roundRect">
+            <a:avLst>
+              <a:gd name="adj" fmla="val 5757"/>
+            </a:avLst>
+          </a:prstGeom>
+          <a:ln w="28575" cmpd="sng">
+            <a:solidFill>
+              <a:schemeClr val="tx1"/>
+            </a:solidFill>
+          </a:ln>
+        </p:spPr>
+        <p:style>
+          <a:lnRef idx="2">
+            <a:schemeClr val="accent5"/>
+          </a:lnRef>
+          <a:fillRef idx="1">
+            <a:schemeClr val="lt1"/>
+          </a:fillRef>
+          <a:effectRef idx="0">
+            <a:schemeClr val="accent5"/>
+          </a:effectRef>
+          <a:fontRef idx="minor">
+            <a:schemeClr val="dk1"/>
+          </a:fontRef>
+        </p:style>
+        <p:txBody>
+          <a:bodyPr rtlCol="0" anchor="ctr"/>
+          <a:lstStyle/>
+          <a:p>
+            <a:pPr algn="r"/>
+            <a:endParaRPr kumimoji="1" lang="zh-CN" altLang="en-US" sz="3600" b="1" dirty="0">
+              <a:highlight>
+                <a:srgbClr val="000000"/>
+              </a:highlight>
+            </a:endParaRPr>
+          </a:p>
+        </p:txBody>
+      </p:sp>
+      <p:sp>
+        <p:nvSpPr>
+          <p:cNvPr id="35" name="圆角矩形 5">
+            <a:extLst>
+              <a:ext uri="{FF2B5EF4-FFF2-40B4-BE49-F238E27FC236}">
+                <a16:creationId xmlns:a16="http://schemas.microsoft.com/office/drawing/2014/main" id="{0456A8B3-12AA-1FEE-A41A-3E92F47410C3}"/>
+              </a:ext>
+            </a:extLst>
+          </p:cNvPr>
+          <p:cNvSpPr/>
+          <p:nvPr/>
+        </p:nvSpPr>
+        <p:spPr>
+          <a:xfrm>
+            <a:off x="1661733" y="1220936"/>
+            <a:ext cx="302955" cy="326225"/>
+          </a:xfrm>
+          <a:prstGeom prst="roundRect">
+            <a:avLst>
+              <a:gd name="adj" fmla="val 5757"/>
+            </a:avLst>
+          </a:prstGeom>
+          <a:ln w="28575" cmpd="sng">
+            <a:solidFill>
+              <a:schemeClr val="tx1"/>
+            </a:solidFill>
+          </a:ln>
+        </p:spPr>
+        <p:style>
+          <a:lnRef idx="2">
+            <a:schemeClr val="accent5"/>
+          </a:lnRef>
+          <a:fillRef idx="1">
+            <a:schemeClr val="lt1"/>
+          </a:fillRef>
+          <a:effectRef idx="0">
+            <a:schemeClr val="accent5"/>
+          </a:effectRef>
+          <a:fontRef idx="minor">
+            <a:schemeClr val="dk1"/>
+          </a:fontRef>
+        </p:style>
+        <p:txBody>
+          <a:bodyPr rtlCol="0" anchor="ctr"/>
+          <a:lstStyle/>
+          <a:p>
+            <a:pPr algn="r"/>
+            <a:endParaRPr kumimoji="1" lang="zh-CN" altLang="en-US" sz="3600" b="1" dirty="0">
+              <a:highlight>
+                <a:srgbClr val="000000"/>
+              </a:highlight>
+            </a:endParaRPr>
+          </a:p>
+        </p:txBody>
+      </p:sp>
+      <p:sp>
+        <p:nvSpPr>
+          <p:cNvPr id="40" name="Freeform 39">
+            <a:extLst>
+              <a:ext uri="{FF2B5EF4-FFF2-40B4-BE49-F238E27FC236}">
+                <a16:creationId xmlns:a16="http://schemas.microsoft.com/office/drawing/2014/main" id="{A113D638-884A-D2C0-56A4-61DC2353E17F}"/>
+              </a:ext>
+            </a:extLst>
+          </p:cNvPr>
+          <p:cNvSpPr/>
+          <p:nvPr/>
+        </p:nvSpPr>
+        <p:spPr>
+          <a:xfrm flipH="1" flipV="1">
+            <a:off x="1777481" y="1417638"/>
+            <a:ext cx="258686" cy="531464"/>
+          </a:xfrm>
+          <a:custGeom>
+            <a:avLst/>
+            <a:gdLst>
+              <a:gd name="connsiteX0" fmla="*/ 786255 w 1016703"/>
+              <a:gd name="connsiteY0" fmla="*/ 2207260 h 2207260"/>
+              <a:gd name="connsiteX1" fmla="*/ 967699 w 1016703"/>
+              <a:gd name="connsiteY1" fmla="*/ 1330403 h 2207260"/>
+              <a:gd name="connsiteX2" fmla="*/ 0 w 1016703"/>
+              <a:gd name="connsiteY2" fmla="*/ 0 h 2207260"/>
+            </a:gdLst>
+            <a:ahLst/>
+            <a:cxnLst>
+              <a:cxn ang="0">
+                <a:pos x="connsiteX0" y="connsiteY0"/>
+              </a:cxn>
+              <a:cxn ang="0">
+                <a:pos x="connsiteX1" y="connsiteY1"/>
+              </a:cxn>
+              <a:cxn ang="0">
+                <a:pos x="connsiteX2" y="connsiteY2"/>
+              </a:cxn>
+            </a:cxnLst>
+            <a:rect l="l" t="t" r="r" b="b"/>
+            <a:pathLst>
+              <a:path w="1016703" h="2207260">
+                <a:moveTo>
+                  <a:pt x="786255" y="2207260"/>
+                </a:moveTo>
+                <a:cubicBezTo>
+                  <a:pt x="942498" y="1952769"/>
+                  <a:pt x="1098741" y="1698279"/>
+                  <a:pt x="967699" y="1330403"/>
+                </a:cubicBezTo>
+                <a:cubicBezTo>
+                  <a:pt x="836657" y="962527"/>
+                  <a:pt x="0" y="0"/>
+                  <a:pt x="0" y="0"/>
+                </a:cubicBezTo>
+              </a:path>
+            </a:pathLst>
+          </a:custGeom>
+          <a:ln>
+            <a:headEnd type="oval" w="lg" len="lg"/>
+            <a:tailEnd type="arrow"/>
+          </a:ln>
+        </p:spPr>
+        <p:style>
+          <a:lnRef idx="2">
+            <a:schemeClr val="accent1"/>
+          </a:lnRef>
+          <a:fillRef idx="0">
+            <a:schemeClr val="accent1"/>
+          </a:fillRef>
+          <a:effectRef idx="1">
+            <a:schemeClr val="accent1"/>
+          </a:effectRef>
+          <a:fontRef idx="minor">
+            <a:schemeClr val="tx1"/>
+          </a:fontRef>
+        </p:style>
+        <p:txBody>
+          <a:bodyPr rtlCol="0" anchor="ctr"/>
+          <a:lstStyle/>
+          <a:p>
+            <a:pPr algn="ctr"/>
+            <a:endParaRPr lang="en-US" dirty="0"/>
+          </a:p>
+        </p:txBody>
+      </p:sp>
+      <p:sp>
+        <p:nvSpPr>
+          <p:cNvPr id="42" name="Freeform 41">
+            <a:extLst>
+              <a:ext uri="{FF2B5EF4-FFF2-40B4-BE49-F238E27FC236}">
+                <a16:creationId xmlns:a16="http://schemas.microsoft.com/office/drawing/2014/main" id="{AB329DDE-0558-0EF2-874E-302668115C07}"/>
+              </a:ext>
+            </a:extLst>
+          </p:cNvPr>
+          <p:cNvSpPr/>
+          <p:nvPr/>
+        </p:nvSpPr>
+        <p:spPr>
+          <a:xfrm>
+            <a:off x="889677" y="1469985"/>
+            <a:ext cx="684480" cy="3252486"/>
+          </a:xfrm>
+          <a:custGeom>
+            <a:avLst/>
+            <a:gdLst>
+              <a:gd name="csX0" fmla="*/ 534009 w 684480"/>
+              <a:gd name="csY0" fmla="*/ 3252486 h 3252486"/>
+              <a:gd name="csX1" fmla="*/ 1574 w 684480"/>
+              <a:gd name="csY1" fmla="*/ 1527858 h 3252486"/>
+              <a:gd name="csX2" fmla="*/ 684480 w 684480"/>
+              <a:gd name="csY2" fmla="*/ 0 h 3252486"/>
+            </a:gdLst>
+            <a:ahLst/>
+            <a:cxnLst>
+              <a:cxn ang="0">
+                <a:pos x="csX0" y="csY0"/>
+              </a:cxn>
+              <a:cxn ang="0">
+                <a:pos x="csX1" y="csY1"/>
+              </a:cxn>
+              <a:cxn ang="0">
+                <a:pos x="csX2" y="csY2"/>
+              </a:cxn>
+            </a:cxnLst>
+            <a:rect l="l" t="t" r="r" b="b"/>
+            <a:pathLst>
+              <a:path w="684480" h="3252486">
+                <a:moveTo>
+                  <a:pt x="534009" y="3252486"/>
+                </a:moveTo>
+                <a:cubicBezTo>
+                  <a:pt x="255252" y="2661212"/>
+                  <a:pt x="-23505" y="2069939"/>
+                  <a:pt x="1574" y="1527858"/>
+                </a:cubicBezTo>
+                <a:cubicBezTo>
+                  <a:pt x="26653" y="985777"/>
+                  <a:pt x="355566" y="492888"/>
+                  <a:pt x="684480" y="0"/>
+                </a:cubicBezTo>
+              </a:path>
+            </a:pathLst>
+          </a:custGeom>
+          <a:noFill/>
+          <a:ln w="25400">
+            <a:headEnd type="oval" w="lg" len="lg"/>
+            <a:tailEnd type="stealth" w="lg" len="lg"/>
+          </a:ln>
+        </p:spPr>
+        <p:style>
+          <a:lnRef idx="1">
+            <a:schemeClr val="accent1"/>
+          </a:lnRef>
+          <a:fillRef idx="3">
+            <a:schemeClr val="accent1"/>
+          </a:fillRef>
+          <a:effectRef idx="2">
+            <a:schemeClr val="accent1"/>
+          </a:effectRef>
+          <a:fontRef idx="minor">
+            <a:schemeClr val="lt1"/>
+          </a:fontRef>
+        </p:style>
+        <p:txBody>
+          <a:bodyPr rtlCol="0" anchor="ctr"/>
+          <a:lstStyle/>
+          <a:p>
+            <a:pPr algn="ctr"/>
+            <a:endParaRPr lang="en-US" dirty="0"/>
+          </a:p>
+        </p:txBody>
+      </p:sp>
+      <p:grpSp>
+        <p:nvGrpSpPr>
+          <p:cNvPr id="45" name="Group 44">
+            <a:extLst>
+              <a:ext uri="{FF2B5EF4-FFF2-40B4-BE49-F238E27FC236}">
+                <a16:creationId xmlns:a16="http://schemas.microsoft.com/office/drawing/2014/main" id="{E11A012D-99DD-5FC6-D10E-960C55D2051A}"/>
+              </a:ext>
+            </a:extLst>
+          </p:cNvPr>
+          <p:cNvGrpSpPr/>
+          <p:nvPr/>
+        </p:nvGrpSpPr>
+        <p:grpSpPr>
+          <a:xfrm>
+            <a:off x="720516" y="5082044"/>
+            <a:ext cx="1437527" cy="369332"/>
+            <a:chOff x="720516" y="5082044"/>
+            <a:chExt cx="1437527" cy="369332"/>
+          </a:xfrm>
+        </p:grpSpPr>
+        <p:sp>
+          <p:nvSpPr>
+            <p:cNvPr id="11" name="TextBox 10">
+              <a:extLst>
+                <a:ext uri="{FF2B5EF4-FFF2-40B4-BE49-F238E27FC236}">
+                  <a16:creationId xmlns:a16="http://schemas.microsoft.com/office/drawing/2014/main" id="{CE4FFA86-7888-BDD8-65D9-77B0A9D78BA9}"/>
+                </a:ext>
+              </a:extLst>
+            </p:cNvPr>
+            <p:cNvSpPr txBox="1"/>
+            <p:nvPr/>
+          </p:nvSpPr>
+          <p:spPr>
+            <a:xfrm>
+              <a:off x="720516" y="5082044"/>
+              <a:ext cx="369012" cy="369332"/>
+            </a:xfrm>
+            <a:prstGeom prst="rect">
+              <a:avLst/>
+            </a:prstGeom>
+            <a:noFill/>
+          </p:spPr>
+          <p:txBody>
+            <a:bodyPr wrap="none" rtlCol="0">
+              <a:spAutoFit/>
+            </a:bodyPr>
+            <a:lstStyle/>
+            <a:p>
+              <a:r>
+                <a:rPr lang="en-US" dirty="0"/>
+                <a:t>n:</a:t>
+              </a:r>
+            </a:p>
+          </p:txBody>
+        </p:sp>
+        <p:sp>
+          <p:nvSpPr>
+            <p:cNvPr id="27" name="圆角矩形 5">
+              <a:extLst>
+                <a:ext uri="{FF2B5EF4-FFF2-40B4-BE49-F238E27FC236}">
+                  <a16:creationId xmlns:a16="http://schemas.microsoft.com/office/drawing/2014/main" id="{EEC8BC27-8854-4105-2F2F-7D00B785076E}"/>
+                </a:ext>
+              </a:extLst>
+            </p:cNvPr>
+            <p:cNvSpPr/>
+            <p:nvPr/>
+          </p:nvSpPr>
+          <p:spPr>
+            <a:xfrm>
+              <a:off x="1267367" y="5109645"/>
+              <a:ext cx="302955" cy="326225"/>
+            </a:xfrm>
+            <a:prstGeom prst="roundRect">
+              <a:avLst>
+                <a:gd name="adj" fmla="val 5757"/>
+              </a:avLst>
+            </a:prstGeom>
+            <a:ln w="28575" cmpd="sng">
+              <a:solidFill>
+                <a:schemeClr val="tx1"/>
+              </a:solidFill>
+            </a:ln>
+          </p:spPr>
+          <p:style>
+            <a:lnRef idx="2">
+              <a:schemeClr val="accent5"/>
+            </a:lnRef>
+            <a:fillRef idx="1">
+              <a:schemeClr val="lt1"/>
+            </a:fillRef>
+            <a:effectRef idx="0">
+              <a:schemeClr val="accent5"/>
+            </a:effectRef>
+            <a:fontRef idx="minor">
+              <a:schemeClr val="dk1"/>
+            </a:fontRef>
+          </p:style>
+          <p:txBody>
+            <a:bodyPr rtlCol="0" anchor="ctr"/>
+            <a:lstStyle/>
+            <a:p>
+              <a:pPr algn="r"/>
+              <a:endParaRPr kumimoji="1" lang="zh-CN" altLang="en-US" sz="3600" b="1" dirty="0">
+                <a:highlight>
+                  <a:srgbClr val="000000"/>
+                </a:highlight>
+              </a:endParaRPr>
+            </a:p>
+          </p:txBody>
+        </p:sp>
+        <p:cxnSp>
+          <p:nvCxnSpPr>
+            <p:cNvPr id="43" name="Straight Arrow Connector 42">
+              <a:extLst>
+                <a:ext uri="{FF2B5EF4-FFF2-40B4-BE49-F238E27FC236}">
+                  <a16:creationId xmlns:a16="http://schemas.microsoft.com/office/drawing/2014/main" id="{FFD1DE97-B0A2-07A6-0B6C-FB7D963152F1}"/>
+                </a:ext>
+              </a:extLst>
+            </p:cNvPr>
+            <p:cNvCxnSpPr>
+              <a:cxnSpLocks/>
+              <a:endCxn id="48" idx="1"/>
+            </p:cNvCxnSpPr>
+            <p:nvPr/>
+          </p:nvCxnSpPr>
+          <p:spPr>
+            <a:xfrm>
+              <a:off x="1428494" y="5251177"/>
+              <a:ext cx="729549" cy="12342"/>
+            </a:xfrm>
+            <a:prstGeom prst="straightConnector1">
+              <a:avLst/>
+            </a:prstGeom>
+            <a:ln>
+              <a:headEnd type="oval" w="lg" len="lg"/>
+              <a:tailEnd type="arrow"/>
+            </a:ln>
+          </p:spPr>
+          <p:style>
+            <a:lnRef idx="2">
+              <a:schemeClr val="accent1"/>
+            </a:lnRef>
+            <a:fillRef idx="0">
+              <a:schemeClr val="accent1"/>
+            </a:fillRef>
+            <a:effectRef idx="1">
+              <a:schemeClr val="accent1"/>
+            </a:effectRef>
+            <a:fontRef idx="minor">
+              <a:schemeClr val="tx1"/>
+            </a:fontRef>
+          </p:style>
+        </p:cxnSp>
+      </p:grpSp>
+      <p:sp>
+        <p:nvSpPr>
+          <p:cNvPr id="51" name="Freeform 50">
+            <a:extLst>
+              <a:ext uri="{FF2B5EF4-FFF2-40B4-BE49-F238E27FC236}">
+                <a16:creationId xmlns:a16="http://schemas.microsoft.com/office/drawing/2014/main" id="{71EE7CB6-4872-41C5-6166-E582430E63D3}"/>
+              </a:ext>
+            </a:extLst>
+          </p:cNvPr>
+          <p:cNvSpPr/>
+          <p:nvPr/>
+        </p:nvSpPr>
+        <p:spPr>
+          <a:xfrm>
+            <a:off x="1499142" y="1359243"/>
+            <a:ext cx="552080" cy="3756454"/>
+          </a:xfrm>
+          <a:custGeom>
+            <a:avLst/>
+            <a:gdLst>
+              <a:gd name="csX0" fmla="*/ 354372 w 552080"/>
+              <a:gd name="csY0" fmla="*/ 0 h 3756454"/>
+              <a:gd name="csX1" fmla="*/ 8382 w 552080"/>
+              <a:gd name="csY1" fmla="*/ 1729946 h 3756454"/>
+              <a:gd name="csX2" fmla="*/ 144307 w 552080"/>
+              <a:gd name="csY2" fmla="*/ 2891481 h 3756454"/>
+              <a:gd name="csX3" fmla="*/ 552080 w 552080"/>
+              <a:gd name="csY3" fmla="*/ 3756454 h 3756454"/>
+            </a:gdLst>
+            <a:ahLst/>
+            <a:cxnLst>
+              <a:cxn ang="0">
+                <a:pos x="csX0" y="csY0"/>
+              </a:cxn>
+              <a:cxn ang="0">
+                <a:pos x="csX1" y="csY1"/>
+              </a:cxn>
+              <a:cxn ang="0">
+                <a:pos x="csX2" y="csY2"/>
+              </a:cxn>
+              <a:cxn ang="0">
+                <a:pos x="csX3" y="csY3"/>
+              </a:cxn>
+            </a:cxnLst>
+            <a:rect l="l" t="t" r="r" b="b"/>
+            <a:pathLst>
+              <a:path w="552080" h="3756454">
+                <a:moveTo>
+                  <a:pt x="354372" y="0"/>
+                </a:moveTo>
+                <a:cubicBezTo>
+                  <a:pt x="198882" y="624016"/>
+                  <a:pt x="43393" y="1248033"/>
+                  <a:pt x="8382" y="1729946"/>
+                </a:cubicBezTo>
+                <a:cubicBezTo>
+                  <a:pt x="-26629" y="2211860"/>
+                  <a:pt x="53691" y="2553730"/>
+                  <a:pt x="144307" y="2891481"/>
+                </a:cubicBezTo>
+                <a:cubicBezTo>
+                  <a:pt x="234923" y="3229232"/>
+                  <a:pt x="393501" y="3492843"/>
+                  <a:pt x="552080" y="3756454"/>
+                </a:cubicBezTo>
+              </a:path>
+            </a:pathLst>
+          </a:custGeom>
+          <a:ln w="25400">
+            <a:headEnd type="oval" w="lg" len="lg"/>
+            <a:tailEnd type="stealth" w="lg" len="lg"/>
+          </a:ln>
+        </p:spPr>
+        <p:style>
+          <a:lnRef idx="1">
+            <a:schemeClr val="accent3"/>
+          </a:lnRef>
+          <a:fillRef idx="0">
+            <a:schemeClr val="accent3"/>
+          </a:fillRef>
+          <a:effectRef idx="0">
+            <a:schemeClr val="accent3"/>
+          </a:effectRef>
+          <a:fontRef idx="minor">
+            <a:schemeClr val="tx1"/>
+          </a:fontRef>
+        </p:style>
+        <p:txBody>
+          <a:bodyPr rtlCol="0" anchor="ctr"/>
+          <a:lstStyle/>
+          <a:p>
+            <a:pPr algn="ctr"/>
+            <a:endParaRPr lang="en-US"/>
           </a:p>
         </p:txBody>
       </p:sp>
@@ -9601,6 +9762,33 @@
                                           </p:stCondLst>
                                         </p:cTn>
                                         <p:tgtEl>
+                                          <p:spTgt spid="45"/>
+                                        </p:tgtEl>
+                                        <p:attrNameLst>
+                                          <p:attrName>style.visibility</p:attrName>
+                                        </p:attrNameLst>
+                                      </p:cBhvr>
+                                      <p:to>
+                                        <p:strVal val="visible"/>
+                                      </p:to>
+                                    </p:set>
+                                  </p:childTnLst>
+                                </p:cTn>
+                              </p:par>
+                              <p:par>
+                                <p:cTn id="11" presetID="1" presetClass="entr" presetSubtype="0" fill="hold" nodeType="withEffect">
+                                  <p:stCondLst>
+                                    <p:cond delay="0"/>
+                                  </p:stCondLst>
+                                  <p:childTnLst>
+                                    <p:set>
+                                      <p:cBhvr>
+                                        <p:cTn id="12" dur="1" fill="hold">
+                                          <p:stCondLst>
+                                            <p:cond delay="0"/>
+                                          </p:stCondLst>
+                                        </p:cTn>
+                                        <p:tgtEl>
                                           <p:spTgt spid="47"/>
                                         </p:tgtEl>
                                         <p:attrNameLst>
@@ -9621,26 +9809,26 @@
                     </p:cTn>
                   </p:par>
                   <p:par>
-                    <p:cTn id="11" fill="hold">
+                    <p:cTn id="13" fill="hold">
                       <p:stCondLst>
                         <p:cond delay="indefinite"/>
                       </p:stCondLst>
                       <p:childTnLst>
                         <p:par>
-                          <p:cTn id="12" fill="hold">
+                          <p:cTn id="14" fill="hold">
                             <p:stCondLst>
                               <p:cond delay="0"/>
                             </p:stCondLst>
                             <p:childTnLst>
                               <p:par>
-                                <p:cTn id="13" presetID="1" presetClass="entr" presetSubtype="0" fill="hold" grpId="0" nodeType="clickEffect">
+                                <p:cTn id="15" presetID="1" presetClass="entr" presetSubtype="0" fill="hold" grpId="0" nodeType="clickEffect">
                                   <p:stCondLst>
                                     <p:cond delay="0"/>
                                   </p:stCondLst>
                                   <p:childTnLst>
                                     <p:set>
                                       <p:cBhvr>
-                                        <p:cTn id="14" dur="1" fill="hold">
+                                        <p:cTn id="16" dur="1" fill="hold">
                                           <p:stCondLst>
                                             <p:cond delay="0"/>
                                           </p:stCondLst>
@@ -9666,26 +9854,26 @@
                     </p:cTn>
                   </p:par>
                   <p:par>
-                    <p:cTn id="15" fill="hold">
+                    <p:cTn id="17" fill="hold">
                       <p:stCondLst>
                         <p:cond delay="indefinite"/>
                       </p:stCondLst>
                       <p:childTnLst>
                         <p:par>
-                          <p:cTn id="16" fill="hold">
+                          <p:cTn id="18" fill="hold">
                             <p:stCondLst>
                               <p:cond delay="0"/>
                             </p:stCondLst>
                             <p:childTnLst>
                               <p:par>
-                                <p:cTn id="17" presetID="1" presetClass="entr" presetSubtype="0" fill="hold" grpId="0" nodeType="clickEffect">
+                                <p:cTn id="19" presetID="1" presetClass="entr" presetSubtype="0" fill="hold" grpId="0" nodeType="clickEffect">
                                   <p:stCondLst>
                                     <p:cond delay="0"/>
                                   </p:stCondLst>
                                   <p:childTnLst>
                                     <p:set>
                                       <p:cBhvr>
-                                        <p:cTn id="18" dur="1" fill="hold">
+                                        <p:cTn id="20" dur="1" fill="hold">
                                           <p:stCondLst>
                                             <p:cond delay="0"/>
                                           </p:stCondLst>
@@ -9711,26 +9899,26 @@
                     </p:cTn>
                   </p:par>
                   <p:par>
-                    <p:cTn id="19" fill="hold">
+                    <p:cTn id="21" fill="hold">
                       <p:stCondLst>
                         <p:cond delay="indefinite"/>
                       </p:stCondLst>
                       <p:childTnLst>
                         <p:par>
-                          <p:cTn id="20" fill="hold">
+                          <p:cTn id="22" fill="hold">
                             <p:stCondLst>
                               <p:cond delay="0"/>
                             </p:stCondLst>
                             <p:childTnLst>
                               <p:par>
-                                <p:cTn id="21" presetID="1" presetClass="entr" presetSubtype="0" fill="hold" grpId="0" nodeType="clickEffect">
+                                <p:cTn id="23" presetID="1" presetClass="entr" presetSubtype="0" fill="hold" grpId="0" nodeType="clickEffect">
                                   <p:stCondLst>
                                     <p:cond delay="0"/>
                                   </p:stCondLst>
                                   <p:childTnLst>
                                     <p:set>
                                       <p:cBhvr>
-                                        <p:cTn id="22" dur="1" fill="hold">
+                                        <p:cTn id="24" dur="1" fill="hold">
                                           <p:stCondLst>
                                             <p:cond delay="0"/>
                                           </p:stCondLst>
@@ -9756,26 +9944,26 @@
                     </p:cTn>
                   </p:par>
                   <p:par>
-                    <p:cTn id="23" fill="hold">
+                    <p:cTn id="25" fill="hold">
                       <p:stCondLst>
                         <p:cond delay="indefinite"/>
                       </p:stCondLst>
                       <p:childTnLst>
                         <p:par>
-                          <p:cTn id="24" fill="hold">
+                          <p:cTn id="26" fill="hold">
                             <p:stCondLst>
                               <p:cond delay="0"/>
                             </p:stCondLst>
                             <p:childTnLst>
                               <p:par>
-                                <p:cTn id="25" presetID="1" presetClass="entr" presetSubtype="0" fill="hold" grpId="0" nodeType="clickEffect">
+                                <p:cTn id="27" presetID="1" presetClass="entr" presetSubtype="0" fill="hold" grpId="0" nodeType="clickEffect">
                                   <p:stCondLst>
                                     <p:cond delay="0"/>
                                   </p:stCondLst>
                                   <p:childTnLst>
                                     <p:set>
                                       <p:cBhvr>
-                                        <p:cTn id="26" dur="1" fill="hold">
+                                        <p:cTn id="28" dur="1" fill="hold">
                                           <p:stCondLst>
                                             <p:cond delay="0"/>
                                           </p:stCondLst>
@@ -9801,26 +9989,26 @@
                     </p:cTn>
                   </p:par>
                   <p:par>
-                    <p:cTn id="27" fill="hold">
+                    <p:cTn id="29" fill="hold">
                       <p:stCondLst>
                         <p:cond delay="indefinite"/>
                       </p:stCondLst>
                       <p:childTnLst>
                         <p:par>
-                          <p:cTn id="28" fill="hold">
+                          <p:cTn id="30" fill="hold">
                             <p:stCondLst>
                               <p:cond delay="0"/>
                             </p:stCondLst>
                             <p:childTnLst>
                               <p:par>
-                                <p:cTn id="29" presetID="1" presetClass="entr" presetSubtype="0" fill="hold" grpId="0" nodeType="clickEffect">
+                                <p:cTn id="31" presetID="1" presetClass="entr" presetSubtype="0" fill="hold" grpId="0" nodeType="clickEffect">
                                   <p:stCondLst>
                                     <p:cond delay="0"/>
                                   </p:stCondLst>
                                   <p:childTnLst>
                                     <p:set>
                                       <p:cBhvr>
-                                        <p:cTn id="30" dur="1" fill="hold">
+                                        <p:cTn id="32" dur="1" fill="hold">
                                           <p:stCondLst>
                                             <p:cond delay="0"/>
                                           </p:stCondLst>
@@ -9846,26 +10034,114 @@
                     </p:cTn>
                   </p:par>
                   <p:par>
-                    <p:cTn id="31" fill="hold">
+                    <p:cTn id="33" fill="hold">
                       <p:stCondLst>
                         <p:cond delay="indefinite"/>
                       </p:stCondLst>
                       <p:childTnLst>
                         <p:par>
-                          <p:cTn id="32" fill="hold">
+                          <p:cTn id="34" fill="hold">
                             <p:stCondLst>
                               <p:cond delay="0"/>
                             </p:stCondLst>
                             <p:childTnLst>
                               <p:par>
-                                <p:cTn id="33" presetID="1" presetClass="entr" presetSubtype="0" fill="hold" nodeType="clickEffect">
+                                <p:cTn id="35" presetID="3" presetClass="exit" presetSubtype="10" fill="hold" grpId="0" nodeType="clickEffect">
+                                  <p:stCondLst>
+                                    <p:cond delay="0"/>
+                                  </p:stCondLst>
+                                  <p:childTnLst>
+                                    <p:animEffect transition="out" filter="blinds(horizontal)">
+                                      <p:cBhvr>
+                                        <p:cTn id="36" dur="500"/>
+                                        <p:tgtEl>
+                                          <p:spTgt spid="40"/>
+                                        </p:tgtEl>
+                                      </p:cBhvr>
+                                    </p:animEffect>
+                                    <p:set>
+                                      <p:cBhvr>
+                                        <p:cTn id="37" dur="1" fill="hold">
+                                          <p:stCondLst>
+                                            <p:cond delay="499"/>
+                                          </p:stCondLst>
+                                        </p:cTn>
+                                        <p:tgtEl>
+                                          <p:spTgt spid="40"/>
+                                        </p:tgtEl>
+                                        <p:attrNameLst>
+                                          <p:attrName>style.visibility</p:attrName>
+                                        </p:attrNameLst>
+                                      </p:cBhvr>
+                                      <p:to>
+                                        <p:strVal val="hidden"/>
+                                      </p:to>
+                                    </p:set>
+                                  </p:childTnLst>
+                                </p:cTn>
+                              </p:par>
+                              <p:par>
+                                <p:cTn id="38" presetID="3" presetClass="entr" presetSubtype="10" fill="hold" grpId="0" nodeType="withEffect">
                                   <p:stCondLst>
                                     <p:cond delay="0"/>
                                   </p:stCondLst>
                                   <p:childTnLst>
                                     <p:set>
                                       <p:cBhvr>
-                                        <p:cTn id="34" dur="1" fill="hold">
+                                        <p:cTn id="39" dur="1" fill="hold">
+                                          <p:stCondLst>
+                                            <p:cond delay="0"/>
+                                          </p:stCondLst>
+                                        </p:cTn>
+                                        <p:tgtEl>
+                                          <p:spTgt spid="51"/>
+                                        </p:tgtEl>
+                                        <p:attrNameLst>
+                                          <p:attrName>style.visibility</p:attrName>
+                                        </p:attrNameLst>
+                                      </p:cBhvr>
+                                      <p:to>
+                                        <p:strVal val="visible"/>
+                                      </p:to>
+                                    </p:set>
+                                    <p:animEffect transition="in" filter="blinds(horizontal)">
+                                      <p:cBhvr>
+                                        <p:cTn id="40" dur="500"/>
+                                        <p:tgtEl>
+                                          <p:spTgt spid="51"/>
+                                        </p:tgtEl>
+                                      </p:cBhvr>
+                                    </p:animEffect>
+                                  </p:childTnLst>
+                                </p:cTn>
+                              </p:par>
+                            </p:childTnLst>
+                          </p:cTn>
+                        </p:par>
+                      </p:childTnLst>
+                    </p:cTn>
+                  </p:par>
+                  <p:par>
+                    <p:cTn id="41" fill="hold">
+                      <p:stCondLst>
+                        <p:cond delay="indefinite"/>
+                      </p:stCondLst>
+                      <p:childTnLst>
+                        <p:par>
+                          <p:cTn id="42" fill="hold">
+                            <p:stCondLst>
+                              <p:cond delay="0"/>
+                            </p:stCondLst>
+                            <p:childTnLst>
+                              <p:par>
+                                <p:cTn id="43" presetID="1" presetClass="entr" presetSubtype="0" fill="hold" nodeType="clickEffect">
+                                  <p:stCondLst>
+                                    <p:cond delay="0"/>
+                                  </p:stCondLst>
+                                  <p:childTnLst>
+                                    <p:set>
+                                      <p:cBhvr>
+                                        <p:cTn id="44" dur="1" fill="hold">
                                           <p:stCondLst>
                                             <p:cond delay="0"/>
                                           </p:stCondLst>
@@ -9891,26 +10167,26 @@
                     </p:cTn>
                   </p:par>
                   <p:par>
-                    <p:cTn id="35" fill="hold">
+                    <p:cTn id="45" fill="hold">
                       <p:stCondLst>
                         <p:cond delay="indefinite"/>
                       </p:stCondLst>
                       <p:childTnLst>
                         <p:par>
-                          <p:cTn id="36" fill="hold">
+                          <p:cTn id="46" fill="hold">
                             <p:stCondLst>
                               <p:cond delay="0"/>
                             </p:stCondLst>
                             <p:childTnLst>
                               <p:par>
-                                <p:cTn id="37" presetID="1" presetClass="entr" presetSubtype="0" fill="hold" grpId="0" nodeType="clickEffect">
+                                <p:cTn id="47" presetID="1" presetClass="entr" presetSubtype="0" fill="hold" grpId="0" nodeType="clickEffect">
                                   <p:stCondLst>
                                     <p:cond delay="0"/>
                                   </p:stCondLst>
                                   <p:childTnLst>
                                     <p:set>
                                       <p:cBhvr>
-                                        <p:cTn id="38" dur="1" fill="hold">
+                                        <p:cTn id="48" dur="1" fill="hold">
                                           <p:stCondLst>
                                             <p:cond delay="0"/>
                                           </p:stCondLst>
@@ -9964,12 +10240,14 @@
       <p:bldP spid="26" grpId="0" animBg="1"/>
       <p:bldP spid="46" grpId="0"/>
       <p:bldP spid="48" grpId="0"/>
+      <p:bldP spid="40" grpId="0" animBg="1"/>
+      <p:bldP spid="51" grpId="0" animBg="1"/>
     </p:bldLst>
   </p:timing>
 </p:sld>
 </file>
 
-<file path=ppt/slides/slide19.xml><?xml version="1.0" encoding="utf-8"?>
+<file path=ppt/slides/slide18.xml><?xml version="1.0" encoding="utf-8"?>
 <p:sld xmlns:a="http://schemas.openxmlformats.org/drawingml/2006/main" xmlns:r="http://schemas.openxmlformats.org/officeDocument/2006/relationships" xmlns:p="http://schemas.openxmlformats.org/presentationml/2006/main">
   <p:cSld>
     <p:spTree>
@@ -10069,10 +10347,18 @@
                 <a:latin typeface="Consolas"/>
                 <a:cs typeface="Consolas"/>
               </a:rPr>
-              <a:t> from linked list, return the new </a:t>
-            </a:r>
-          </a:p>
-          <a:p>
+              <a:t> from linked list; modify the head pointer pointed to by </a:t>
+            </a:r>
+            <a:r>
+              <a:rPr lang="en-US" altLang="zh-CN" dirty="0" err="1">
+                <a:solidFill>
+                  <a:srgbClr val="0000FF"/>
+                </a:solidFill>
+                <a:latin typeface="Consolas"/>
+                <a:cs typeface="Consolas"/>
+              </a:rPr>
+              <a:t>headp</a:t>
+            </a:r>
             <a:r>
               <a:rPr lang="en-US" altLang="zh-CN" dirty="0">
                 <a:solidFill>
@@ -10081,7 +10367,7 @@
                 <a:latin typeface="Consolas"/>
                 <a:cs typeface="Consolas"/>
               </a:rPr>
-              <a:t>// head of the list.</a:t>
+              <a:t> if needed </a:t>
             </a:r>
           </a:p>
           <a:p>
@@ -10090,7 +10376,21 @@
                 <a:latin typeface="Consolas"/>
                 <a:cs typeface="Consolas"/>
               </a:rPr>
-              <a:t>node* remove(node *head, int </a:t>
+              <a:t>void remove(node **</a:t>
+            </a:r>
+            <a:r>
+              <a:rPr lang="en-US" altLang="zh-CN" sz="2000" dirty="0" err="1">
+                <a:latin typeface="Consolas"/>
+                <a:cs typeface="Consolas"/>
+              </a:rPr>
+              <a:t>headp</a:t>
+            </a:r>
+            <a:r>
+              <a:rPr lang="en-US" altLang="zh-CN" sz="2000" dirty="0">
+                <a:latin typeface="Consolas"/>
+                <a:cs typeface="Consolas"/>
+              </a:rPr>
+              <a:t>, int </a:t>
             </a:r>
             <a:r>
               <a:rPr lang="en-US" altLang="zh-CN" sz="2000" dirty="0" err="1">
@@ -10295,87 +10595,7 @@
 </p:sld>
 </file>
 
-<file path=ppt/slides/slide2.xml><?xml version="1.0" encoding="utf-8"?>
-<p:sld xmlns:a="http://schemas.openxmlformats.org/drawingml/2006/main" xmlns:r="http://schemas.openxmlformats.org/officeDocument/2006/relationships" xmlns:p="http://schemas.openxmlformats.org/presentationml/2006/main" show="0">
-  <p:cSld>
-    <p:spTree>
-      <p:nvGrpSpPr>
-        <p:cNvPr id="1" name=""/>
-        <p:cNvGrpSpPr/>
-        <p:nvPr/>
-      </p:nvGrpSpPr>
-      <p:grpSpPr>
-        <a:xfrm>
-          <a:off x="0" y="0"/>
-          <a:ext cx="0" cy="0"/>
-          <a:chOff x="0" y="0"/>
-          <a:chExt cx="0" cy="0"/>
-        </a:xfrm>
-      </p:grpSpPr>
-      <p:sp>
-        <p:nvSpPr>
-          <p:cNvPr id="2" name="Title 1"/>
-          <p:cNvSpPr>
-            <a:spLocks noGrp="1"/>
-          </p:cNvSpPr>
-          <p:nvPr>
-            <p:ph type="title"/>
-          </p:nvPr>
-        </p:nvSpPr>
-        <p:spPr/>
-        <p:txBody>
-          <a:bodyPr/>
-          <a:lstStyle/>
-          <a:p>
-            <a:r>
-              <a:rPr lang="en-US" dirty="0"/>
-              <a:t>Lesson plan</a:t>
-            </a:r>
-          </a:p>
-        </p:txBody>
-      </p:sp>
-      <p:sp>
-        <p:nvSpPr>
-          <p:cNvPr id="4" name="Content Placeholder 3"/>
-          <p:cNvSpPr>
-            <a:spLocks noGrp="1"/>
-          </p:cNvSpPr>
-          <p:nvPr>
-            <p:ph idx="1"/>
-          </p:nvPr>
-        </p:nvSpPr>
-        <p:spPr/>
-        <p:txBody>
-          <a:bodyPr/>
-          <a:lstStyle/>
-          <a:p>
-            <a:r>
-              <a:rPr lang="en-US" dirty="0"/>
-              <a:t>struct: grouping variables</a:t>
-            </a:r>
-          </a:p>
-          <a:p>
-            <a:r>
-              <a:rPr lang="en-US" dirty="0"/>
-              <a:t>malloc: dynamic memory allocation</a:t>
-            </a:r>
-          </a:p>
-        </p:txBody>
-      </p:sp>
-    </p:spTree>
-    <p:extLst>
-      <p:ext uri="{BB962C8B-B14F-4D97-AF65-F5344CB8AC3E}">
-        <p14:creationId xmlns:p14="http://schemas.microsoft.com/office/powerpoint/2010/main" val="3285323824"/>
-      </p:ext>
-    </p:extLst>
-  </p:cSld>
-  <p:clrMapOvr>
-    <a:masterClrMapping/>
-  </p:clrMapOvr>
-</p:sld>
-</file>
-
-<file path=ppt/slides/slide20.xml><?xml version="1.0" encoding="utf-8"?>
+<file path=ppt/slides/slide19.xml><?xml version="1.0" encoding="utf-8"?>
 <p:sld xmlns:a="http://schemas.openxmlformats.org/drawingml/2006/main" xmlns:r="http://schemas.openxmlformats.org/officeDocument/2006/relationships" xmlns:p="http://schemas.openxmlformats.org/presentationml/2006/main">
   <p:cSld>
     <p:spTree>
@@ -10894,74 +11114,6 @@
           </a:fontRef>
         </p:style>
       </p:cxnSp>
-      <p:cxnSp>
-        <p:nvCxnSpPr>
-          <p:cNvPr id="37" name="直线箭头连接符 46"/>
-          <p:cNvCxnSpPr/>
-          <p:nvPr/>
-        </p:nvCxnSpPr>
-        <p:spPr>
-          <a:xfrm flipV="1">
-            <a:off x="2011020" y="2457635"/>
-            <a:ext cx="0" cy="373764"/>
-          </a:xfrm>
-          <a:prstGeom prst="straightConnector1">
-            <a:avLst/>
-          </a:prstGeom>
-          <a:ln>
-            <a:tailEnd type="arrow"/>
-          </a:ln>
-        </p:spPr>
-        <p:style>
-          <a:lnRef idx="2">
-            <a:schemeClr val="dk1"/>
-          </a:lnRef>
-          <a:fillRef idx="0">
-            <a:schemeClr val="dk1"/>
-          </a:fillRef>
-          <a:effectRef idx="1">
-            <a:schemeClr val="dk1"/>
-          </a:effectRef>
-          <a:fontRef idx="minor">
-            <a:schemeClr val="tx1"/>
-          </a:fontRef>
-        </p:style>
-      </p:cxnSp>
-      <p:sp>
-        <p:nvSpPr>
-          <p:cNvPr id="38" name="矩形 49"/>
-          <p:cNvSpPr/>
-          <p:nvPr/>
-        </p:nvSpPr>
-        <p:spPr>
-          <a:xfrm>
-            <a:off x="1637655" y="2821641"/>
-            <a:ext cx="723425" cy="369332"/>
-          </a:xfrm>
-          <a:prstGeom prst="rect">
-            <a:avLst/>
-          </a:prstGeom>
-        </p:spPr>
-        <p:txBody>
-          <a:bodyPr wrap="none">
-            <a:spAutoFit/>
-          </a:bodyPr>
-          <a:lstStyle/>
-          <a:p>
-            <a:r>
-              <a:rPr lang="en-US" altLang="zh-CN" b="1" dirty="0">
-                <a:latin typeface="Arial"/>
-                <a:cs typeface="Arial"/>
-              </a:rPr>
-              <a:t>head</a:t>
-            </a:r>
-            <a:endParaRPr lang="zh-CN" altLang="en-US" dirty="0">
-              <a:latin typeface="Arial"/>
-              <a:cs typeface="Arial"/>
-            </a:endParaRPr>
-          </a:p>
-        </p:txBody>
-      </p:sp>
       <p:sp>
         <p:nvSpPr>
           <p:cNvPr id="19" name="TextBox 18">
@@ -10994,7 +11146,19 @@
               <a:rPr lang="en-US" dirty="0">
                 <a:latin typeface="Consolas" panose="020B0609020204030204" pitchFamily="49" charset="0"/>
               </a:rPr>
-              <a:t>node* remove(node *head, int </a:t>
+              <a:t>void remove(node **</a:t>
+            </a:r>
+            <a:r>
+              <a:rPr lang="en-US" dirty="0" err="1">
+                <a:latin typeface="Consolas" panose="020B0609020204030204" pitchFamily="49" charset="0"/>
+              </a:rPr>
+              <a:t>headp</a:t>
+            </a:r>
+            <a:r>
+              <a:rPr lang="en-US" dirty="0">
+                <a:latin typeface="Consolas" panose="020B0609020204030204" pitchFamily="49" charset="0"/>
+              </a:rPr>
+              <a:t>, int </a:t>
             </a:r>
             <a:r>
               <a:rPr lang="en-US" dirty="0" err="1">
@@ -11367,6 +11531,338 @@
           </a:p>
         </p:txBody>
       </p:sp>
+      <p:sp>
+        <p:nvSpPr>
+          <p:cNvPr id="3" name="TextBox 2">
+            <a:extLst>
+              <a:ext uri="{FF2B5EF4-FFF2-40B4-BE49-F238E27FC236}">
+                <a16:creationId xmlns:a16="http://schemas.microsoft.com/office/drawing/2014/main" id="{8C451666-8967-9CDA-67DB-B5A5440CF272}"/>
+              </a:ext>
+            </a:extLst>
+          </p:cNvPr>
+          <p:cNvSpPr txBox="1"/>
+          <p:nvPr/>
+        </p:nvSpPr>
+        <p:spPr>
+          <a:xfrm>
+            <a:off x="766168" y="2924419"/>
+            <a:ext cx="891591" cy="369332"/>
+          </a:xfrm>
+          <a:prstGeom prst="rect">
+            <a:avLst/>
+          </a:prstGeom>
+          <a:noFill/>
+        </p:spPr>
+        <p:txBody>
+          <a:bodyPr wrap="none" rtlCol="0">
+            <a:spAutoFit/>
+          </a:bodyPr>
+          <a:lstStyle/>
+          <a:p>
+            <a:r>
+              <a:rPr lang="en-US" dirty="0" err="1"/>
+              <a:t>headp</a:t>
+            </a:r>
+            <a:r>
+              <a:rPr lang="en-US" dirty="0"/>
+              <a:t>: </a:t>
+            </a:r>
+          </a:p>
+        </p:txBody>
+      </p:sp>
+      <p:sp>
+        <p:nvSpPr>
+          <p:cNvPr id="4" name="圆角矩形 5">
+            <a:extLst>
+              <a:ext uri="{FF2B5EF4-FFF2-40B4-BE49-F238E27FC236}">
+                <a16:creationId xmlns:a16="http://schemas.microsoft.com/office/drawing/2014/main" id="{3A7E4244-055C-E13E-B3B3-512D7D681EFC}"/>
+              </a:ext>
+            </a:extLst>
+          </p:cNvPr>
+          <p:cNvSpPr/>
+          <p:nvPr/>
+        </p:nvSpPr>
+        <p:spPr>
+          <a:xfrm>
+            <a:off x="1565839" y="2934017"/>
+            <a:ext cx="302955" cy="326225"/>
+          </a:xfrm>
+          <a:prstGeom prst="roundRect">
+            <a:avLst>
+              <a:gd name="adj" fmla="val 5757"/>
+            </a:avLst>
+          </a:prstGeom>
+          <a:ln w="28575" cmpd="sng">
+            <a:solidFill>
+              <a:schemeClr val="tx1"/>
+            </a:solidFill>
+          </a:ln>
+        </p:spPr>
+        <p:style>
+          <a:lnRef idx="2">
+            <a:schemeClr val="accent5"/>
+          </a:lnRef>
+          <a:fillRef idx="1">
+            <a:schemeClr val="lt1"/>
+          </a:fillRef>
+          <a:effectRef idx="0">
+            <a:schemeClr val="accent5"/>
+          </a:effectRef>
+          <a:fontRef idx="minor">
+            <a:schemeClr val="dk1"/>
+          </a:fontRef>
+        </p:style>
+        <p:txBody>
+          <a:bodyPr rtlCol="0" anchor="ctr"/>
+          <a:lstStyle/>
+          <a:p>
+            <a:pPr algn="r"/>
+            <a:endParaRPr kumimoji="1" lang="zh-CN" altLang="en-US" sz="3600" b="1" dirty="0">
+              <a:highlight>
+                <a:srgbClr val="000000"/>
+              </a:highlight>
+            </a:endParaRPr>
+          </a:p>
+        </p:txBody>
+      </p:sp>
+      <p:sp>
+        <p:nvSpPr>
+          <p:cNvPr id="7" name="圆角矩形 5">
+            <a:extLst>
+              <a:ext uri="{FF2B5EF4-FFF2-40B4-BE49-F238E27FC236}">
+                <a16:creationId xmlns:a16="http://schemas.microsoft.com/office/drawing/2014/main" id="{1B14AD96-AF4C-51C4-97A6-DD2D1241C962}"/>
+              </a:ext>
+            </a:extLst>
+          </p:cNvPr>
+          <p:cNvSpPr/>
+          <p:nvPr/>
+        </p:nvSpPr>
+        <p:spPr>
+          <a:xfrm>
+            <a:off x="1506281" y="1273047"/>
+            <a:ext cx="302955" cy="326225"/>
+          </a:xfrm>
+          <a:prstGeom prst="roundRect">
+            <a:avLst>
+              <a:gd name="adj" fmla="val 5757"/>
+            </a:avLst>
+          </a:prstGeom>
+          <a:ln w="28575" cmpd="sng">
+            <a:solidFill>
+              <a:schemeClr val="tx1"/>
+            </a:solidFill>
+          </a:ln>
+        </p:spPr>
+        <p:style>
+          <a:lnRef idx="2">
+            <a:schemeClr val="accent5"/>
+          </a:lnRef>
+          <a:fillRef idx="1">
+            <a:schemeClr val="lt1"/>
+          </a:fillRef>
+          <a:effectRef idx="0">
+            <a:schemeClr val="accent5"/>
+          </a:effectRef>
+          <a:fontRef idx="minor">
+            <a:schemeClr val="dk1"/>
+          </a:fontRef>
+        </p:style>
+        <p:txBody>
+          <a:bodyPr rtlCol="0" anchor="ctr"/>
+          <a:lstStyle/>
+          <a:p>
+            <a:pPr algn="r"/>
+            <a:endParaRPr kumimoji="1" lang="zh-CN" altLang="en-US" sz="3600" b="1" dirty="0">
+              <a:highlight>
+                <a:srgbClr val="000000"/>
+              </a:highlight>
+            </a:endParaRPr>
+          </a:p>
+        </p:txBody>
+      </p:sp>
+      <p:sp>
+        <p:nvSpPr>
+          <p:cNvPr id="9" name="Freeform 8">
+            <a:extLst>
+              <a:ext uri="{FF2B5EF4-FFF2-40B4-BE49-F238E27FC236}">
+                <a16:creationId xmlns:a16="http://schemas.microsoft.com/office/drawing/2014/main" id="{9EE5FD77-3F12-0EF6-A408-5EB68553E206}"/>
+              </a:ext>
+            </a:extLst>
+          </p:cNvPr>
+          <p:cNvSpPr/>
+          <p:nvPr/>
+        </p:nvSpPr>
+        <p:spPr>
+          <a:xfrm flipH="1" flipV="1">
+            <a:off x="1622029" y="1469749"/>
+            <a:ext cx="258686" cy="531464"/>
+          </a:xfrm>
+          <a:custGeom>
+            <a:avLst/>
+            <a:gdLst>
+              <a:gd name="connsiteX0" fmla="*/ 786255 w 1016703"/>
+              <a:gd name="connsiteY0" fmla="*/ 2207260 h 2207260"/>
+              <a:gd name="connsiteX1" fmla="*/ 967699 w 1016703"/>
+              <a:gd name="connsiteY1" fmla="*/ 1330403 h 2207260"/>
+              <a:gd name="connsiteX2" fmla="*/ 0 w 1016703"/>
+              <a:gd name="connsiteY2" fmla="*/ 0 h 2207260"/>
+            </a:gdLst>
+            <a:ahLst/>
+            <a:cxnLst>
+              <a:cxn ang="0">
+                <a:pos x="connsiteX0" y="connsiteY0"/>
+              </a:cxn>
+              <a:cxn ang="0">
+                <a:pos x="connsiteX1" y="connsiteY1"/>
+              </a:cxn>
+              <a:cxn ang="0">
+                <a:pos x="connsiteX2" y="connsiteY2"/>
+              </a:cxn>
+            </a:cxnLst>
+            <a:rect l="l" t="t" r="r" b="b"/>
+            <a:pathLst>
+              <a:path w="1016703" h="2207260">
+                <a:moveTo>
+                  <a:pt x="786255" y="2207260"/>
+                </a:moveTo>
+                <a:cubicBezTo>
+                  <a:pt x="942498" y="1952769"/>
+                  <a:pt x="1098741" y="1698279"/>
+                  <a:pt x="967699" y="1330403"/>
+                </a:cubicBezTo>
+                <a:cubicBezTo>
+                  <a:pt x="836657" y="962527"/>
+                  <a:pt x="0" y="0"/>
+                  <a:pt x="0" y="0"/>
+                </a:cubicBezTo>
+              </a:path>
+            </a:pathLst>
+          </a:custGeom>
+          <a:ln>
+            <a:headEnd type="oval" w="lg" len="lg"/>
+            <a:tailEnd type="arrow"/>
+          </a:ln>
+        </p:spPr>
+        <p:style>
+          <a:lnRef idx="2">
+            <a:schemeClr val="accent1"/>
+          </a:lnRef>
+          <a:fillRef idx="0">
+            <a:schemeClr val="accent1"/>
+          </a:fillRef>
+          <a:effectRef idx="1">
+            <a:schemeClr val="accent1"/>
+          </a:effectRef>
+          <a:fontRef idx="minor">
+            <a:schemeClr val="tx1"/>
+          </a:fontRef>
+        </p:style>
+        <p:txBody>
+          <a:bodyPr rtlCol="0" anchor="ctr"/>
+          <a:lstStyle/>
+          <a:p>
+            <a:pPr algn="ctr"/>
+            <a:endParaRPr lang="en-US" dirty="0"/>
+          </a:p>
+        </p:txBody>
+      </p:sp>
+      <p:sp>
+        <p:nvSpPr>
+          <p:cNvPr id="21" name="Freeform 20">
+            <a:extLst>
+              <a:ext uri="{FF2B5EF4-FFF2-40B4-BE49-F238E27FC236}">
+                <a16:creationId xmlns:a16="http://schemas.microsoft.com/office/drawing/2014/main" id="{11480051-80B8-870A-8B32-F0D3BC4FC3A0}"/>
+              </a:ext>
+            </a:extLst>
+          </p:cNvPr>
+          <p:cNvSpPr/>
+          <p:nvPr/>
+        </p:nvSpPr>
+        <p:spPr>
+          <a:xfrm>
+            <a:off x="1208242" y="1482811"/>
+            <a:ext cx="546417" cy="1631092"/>
+          </a:xfrm>
+          <a:custGeom>
+            <a:avLst/>
+            <a:gdLst>
+              <a:gd name="csX0" fmla="*/ 546417 w 546417"/>
+              <a:gd name="csY0" fmla="*/ 1631092 h 1631092"/>
+              <a:gd name="csX1" fmla="*/ 64504 w 546417"/>
+              <a:gd name="csY1" fmla="*/ 902043 h 1631092"/>
+              <a:gd name="csX2" fmla="*/ 27434 w 546417"/>
+              <a:gd name="csY2" fmla="*/ 321275 h 1631092"/>
+              <a:gd name="csX3" fmla="*/ 274569 w 546417"/>
+              <a:gd name="csY3" fmla="*/ 0 h 1631092"/>
+            </a:gdLst>
+            <a:ahLst/>
+            <a:cxnLst>
+              <a:cxn ang="0">
+                <a:pos x="csX0" y="csY0"/>
+              </a:cxn>
+              <a:cxn ang="0">
+                <a:pos x="csX1" y="csY1"/>
+              </a:cxn>
+              <a:cxn ang="0">
+                <a:pos x="csX2" y="csY2"/>
+              </a:cxn>
+              <a:cxn ang="0">
+                <a:pos x="csX3" y="csY3"/>
+              </a:cxn>
+            </a:cxnLst>
+            <a:rect l="l" t="t" r="r" b="b"/>
+            <a:pathLst>
+              <a:path w="546417" h="1631092">
+                <a:moveTo>
+                  <a:pt x="546417" y="1631092"/>
+                </a:moveTo>
+                <a:cubicBezTo>
+                  <a:pt x="348709" y="1375719"/>
+                  <a:pt x="151001" y="1120346"/>
+                  <a:pt x="64504" y="902043"/>
+                </a:cubicBezTo>
+                <a:cubicBezTo>
+                  <a:pt x="-21993" y="683740"/>
+                  <a:pt x="-7577" y="471615"/>
+                  <a:pt x="27434" y="321275"/>
+                </a:cubicBezTo>
+                <a:cubicBezTo>
+                  <a:pt x="62445" y="170935"/>
+                  <a:pt x="168507" y="85467"/>
+                  <a:pt x="274569" y="0"/>
+                </a:cubicBezTo>
+              </a:path>
+            </a:pathLst>
+          </a:custGeom>
+          <a:noFill/>
+          <a:ln w="25400">
+            <a:headEnd type="oval" w="lg" len="lg"/>
+            <a:tailEnd type="stealth" w="lg" len="lg"/>
+          </a:ln>
+        </p:spPr>
+        <p:style>
+          <a:lnRef idx="1">
+            <a:schemeClr val="accent1"/>
+          </a:lnRef>
+          <a:fillRef idx="3">
+            <a:schemeClr val="accent1"/>
+          </a:fillRef>
+          <a:effectRef idx="2">
+            <a:schemeClr val="accent1"/>
+          </a:effectRef>
+          <a:fontRef idx="minor">
+            <a:schemeClr val="lt1"/>
+          </a:fontRef>
+        </p:style>
+        <p:txBody>
+          <a:bodyPr rtlCol="0" anchor="ctr"/>
+          <a:lstStyle/>
+          <a:p>
+            <a:pPr algn="ctr"/>
+            <a:endParaRPr lang="en-US"/>
+          </a:p>
+        </p:txBody>
+      </p:sp>
     </p:spTree>
     <p:extLst>
       <p:ext uri="{BB962C8B-B14F-4D97-AF65-F5344CB8AC3E}">
@@ -11520,6 +12016,59 @@
                       </p:childTnLst>
                     </p:cTn>
                   </p:par>
+                  <p:par>
+                    <p:cTn id="15" fill="hold">
+                      <p:stCondLst>
+                        <p:cond delay="indefinite"/>
+                      </p:stCondLst>
+                      <p:childTnLst>
+                        <p:par>
+                          <p:cTn id="16" fill="hold">
+                            <p:stCondLst>
+                              <p:cond delay="0"/>
+                            </p:stCondLst>
+                            <p:childTnLst>
+                              <p:par>
+                                <p:cTn id="17" presetID="3" presetClass="exit" presetSubtype="10" fill="hold" grpId="0" nodeType="clickEffect">
+                                  <p:stCondLst>
+                                    <p:cond delay="0"/>
+                                  </p:stCondLst>
+                                  <p:childTnLst>
+                                    <p:animEffect transition="out" filter="blinds(horizontal)">
+                                      <p:cBhvr>
+                                        <p:cTn id="18" dur="500"/>
+                                        <p:tgtEl>
+                                          <p:spTgt spid="9"/>
+                                        </p:tgtEl>
+                                      </p:cBhvr>
+                                    </p:animEffect>
+                                    <p:set>
+                                      <p:cBhvr>
+                                        <p:cTn id="19" dur="1" fill="hold">
+                                          <p:stCondLst>
+                                            <p:cond delay="499"/>
+                                          </p:stCondLst>
+                                        </p:cTn>
+                                        <p:tgtEl>
+                                          <p:spTgt spid="9"/>
+                                        </p:tgtEl>
+                                        <p:attrNameLst>
+                                          <p:attrName>style.visibility</p:attrName>
+                                        </p:attrNameLst>
+                                      </p:cBhvr>
+                                      <p:to>
+                                        <p:strVal val="hidden"/>
+                                      </p:to>
+                                    </p:set>
+                                  </p:childTnLst>
+                                </p:cTn>
+                              </p:par>
+                            </p:childTnLst>
+                          </p:cTn>
+                        </p:par>
+                      </p:childTnLst>
+                    </p:cTn>
+                  </p:par>
                 </p:childTnLst>
               </p:cTn>
               <p:prevCondLst>
@@ -11543,12 +12092,93 @@
     </p:tnLst>
     <p:bldLst>
       <p:bldP spid="22" grpId="0"/>
+      <p:bldP spid="9" grpId="0" animBg="1"/>
     </p:bldLst>
   </p:timing>
 </p:sld>
 </file>
 
-<file path=ppt/slides/slide21.xml><?xml version="1.0" encoding="utf-8"?>
+<file path=ppt/slides/slide2.xml><?xml version="1.0" encoding="utf-8"?>
+<p:sld xmlns:a="http://schemas.openxmlformats.org/drawingml/2006/main" xmlns:r="http://schemas.openxmlformats.org/officeDocument/2006/relationships" xmlns:p="http://schemas.openxmlformats.org/presentationml/2006/main" show="0">
+  <p:cSld>
+    <p:spTree>
+      <p:nvGrpSpPr>
+        <p:cNvPr id="1" name=""/>
+        <p:cNvGrpSpPr/>
+        <p:nvPr/>
+      </p:nvGrpSpPr>
+      <p:grpSpPr>
+        <a:xfrm>
+          <a:off x="0" y="0"/>
+          <a:ext cx="0" cy="0"/>
+          <a:chOff x="0" y="0"/>
+          <a:chExt cx="0" cy="0"/>
+        </a:xfrm>
+      </p:grpSpPr>
+      <p:sp>
+        <p:nvSpPr>
+          <p:cNvPr id="2" name="Title 1"/>
+          <p:cNvSpPr>
+            <a:spLocks noGrp="1"/>
+          </p:cNvSpPr>
+          <p:nvPr>
+            <p:ph type="title"/>
+          </p:nvPr>
+        </p:nvSpPr>
+        <p:spPr/>
+        <p:txBody>
+          <a:bodyPr/>
+          <a:lstStyle/>
+          <a:p>
+            <a:r>
+              <a:rPr lang="en-US" dirty="0"/>
+              <a:t>Lesson plan</a:t>
+            </a:r>
+          </a:p>
+        </p:txBody>
+      </p:sp>
+      <p:sp>
+        <p:nvSpPr>
+          <p:cNvPr id="4" name="Content Placeholder 3"/>
+          <p:cNvSpPr>
+            <a:spLocks noGrp="1"/>
+          </p:cNvSpPr>
+          <p:nvPr>
+            <p:ph idx="1"/>
+          </p:nvPr>
+        </p:nvSpPr>
+        <p:spPr/>
+        <p:txBody>
+          <a:bodyPr/>
+          <a:lstStyle/>
+          <a:p>
+            <a:r>
+              <a:rPr lang="en-US" dirty="0"/>
+              <a:t>struct: grouping variables</a:t>
+            </a:r>
+          </a:p>
+          <a:p>
+            <a:r>
+              <a:rPr lang="en-US" dirty="0"/>
+              <a:t>malloc: dynamic memory allocation</a:t>
+            </a:r>
+          </a:p>
+        </p:txBody>
+      </p:sp>
+    </p:spTree>
+    <p:extLst>
+      <p:ext uri="{BB962C8B-B14F-4D97-AF65-F5344CB8AC3E}">
+        <p14:creationId xmlns:p14="http://schemas.microsoft.com/office/powerpoint/2010/main" val="3285323824"/>
+      </p:ext>
+    </p:extLst>
+  </p:cSld>
+  <p:clrMapOvr>
+    <a:masterClrMapping/>
+  </p:clrMapOvr>
+</p:sld>
+</file>
+
+<file path=ppt/slides/slide20.xml><?xml version="1.0" encoding="utf-8"?>
 <p:sld xmlns:a="http://schemas.openxmlformats.org/drawingml/2006/main" xmlns:r="http://schemas.openxmlformats.org/officeDocument/2006/relationships" xmlns:p="http://schemas.openxmlformats.org/presentationml/2006/main">
   <p:cSld>
     <p:spTree>
@@ -12067,74 +12697,6 @@
           </a:fontRef>
         </p:style>
       </p:cxnSp>
-      <p:cxnSp>
-        <p:nvCxnSpPr>
-          <p:cNvPr id="37" name="直线箭头连接符 46"/>
-          <p:cNvCxnSpPr/>
-          <p:nvPr/>
-        </p:nvCxnSpPr>
-        <p:spPr>
-          <a:xfrm flipV="1">
-            <a:off x="2011020" y="2457635"/>
-            <a:ext cx="0" cy="373764"/>
-          </a:xfrm>
-          <a:prstGeom prst="straightConnector1">
-            <a:avLst/>
-          </a:prstGeom>
-          <a:ln>
-            <a:tailEnd type="arrow"/>
-          </a:ln>
-        </p:spPr>
-        <p:style>
-          <a:lnRef idx="2">
-            <a:schemeClr val="dk1"/>
-          </a:lnRef>
-          <a:fillRef idx="0">
-            <a:schemeClr val="dk1"/>
-          </a:fillRef>
-          <a:effectRef idx="1">
-            <a:schemeClr val="dk1"/>
-          </a:effectRef>
-          <a:fontRef idx="minor">
-            <a:schemeClr val="tx1"/>
-          </a:fontRef>
-        </p:style>
-      </p:cxnSp>
-      <p:sp>
-        <p:nvSpPr>
-          <p:cNvPr id="38" name="矩形 49"/>
-          <p:cNvSpPr/>
-          <p:nvPr/>
-        </p:nvSpPr>
-        <p:spPr>
-          <a:xfrm>
-            <a:off x="1637655" y="2821641"/>
-            <a:ext cx="723425" cy="369332"/>
-          </a:xfrm>
-          <a:prstGeom prst="rect">
-            <a:avLst/>
-          </a:prstGeom>
-        </p:spPr>
-        <p:txBody>
-          <a:bodyPr wrap="none">
-            <a:spAutoFit/>
-          </a:bodyPr>
-          <a:lstStyle/>
-          <a:p>
-            <a:r>
-              <a:rPr lang="en-US" altLang="zh-CN" b="1" dirty="0">
-                <a:latin typeface="Arial"/>
-                <a:cs typeface="Arial"/>
-              </a:rPr>
-              <a:t>head</a:t>
-            </a:r>
-            <a:endParaRPr lang="zh-CN" altLang="en-US" dirty="0">
-              <a:latin typeface="Arial"/>
-              <a:cs typeface="Arial"/>
-            </a:endParaRPr>
-          </a:p>
-        </p:txBody>
-      </p:sp>
       <p:grpSp>
         <p:nvGrpSpPr>
           <p:cNvPr id="24" name="Group 23">
@@ -12423,7 +12985,15 @@
           <a:p>
             <a:r>
               <a:rPr lang="en-US" dirty="0"/>
-              <a:t>node *remove(node *head, int </a:t>
+              <a:t>void remove(node **</a:t>
+            </a:r>
+            <a:r>
+              <a:rPr lang="en-US" dirty="0" err="1"/>
+              <a:t>headp</a:t>
+            </a:r>
+            <a:r>
+              <a:rPr lang="en-US" dirty="0"/>
+              <a:t>, int </a:t>
             </a:r>
             <a:r>
               <a:rPr lang="en-US" dirty="0" err="1"/>
@@ -12652,7 +13222,7 @@
             <a:p>
               <a:r>
                 <a:rPr lang="en-US" dirty="0"/>
-                <a:t>       if (n-&gt;</a:t>
+                <a:t>         if (n-&gt;</a:t>
               </a:r>
               <a:r>
                 <a:rPr lang="en-US" dirty="0" err="1"/>
@@ -12680,15 +13250,7 @@
             <a:p>
               <a:r>
                 <a:rPr lang="en-US" dirty="0"/>
-                <a:t>      </a:t>
-              </a:r>
-              <a:r>
-                <a:rPr lang="en-US" dirty="0" err="1">
-                  <a:solidFill>
-                    <a:srgbClr val="0432FF"/>
-                  </a:solidFill>
-                </a:rPr>
-                <a:t>pred</a:t>
+                <a:t>         </a:t>
               </a:r>
               <a:r>
                 <a:rPr lang="en-US" dirty="0">
@@ -12696,13 +13258,13 @@
                     <a:srgbClr val="0432FF"/>
                   </a:solidFill>
                 </a:rPr>
-                <a:t> = n;</a:t>
+                <a:t>pred = n;</a:t>
               </a:r>
             </a:p>
             <a:p>
               <a:r>
                 <a:rPr lang="en-US" dirty="0"/>
-                <a:t>       n = n-&gt;next;</a:t>
+                <a:t>         n = n-&gt;next;</a:t>
               </a:r>
             </a:p>
             <a:p>
@@ -12903,7 +13465,7 @@
 </p:sld>
 </file>
 
-<file path=ppt/slides/slide22.xml><?xml version="1.0" encoding="utf-8"?>
+<file path=ppt/slides/slide21.xml><?xml version="1.0" encoding="utf-8"?>
 <p:sld xmlns:a="http://schemas.openxmlformats.org/drawingml/2006/main" xmlns:r="http://schemas.openxmlformats.org/officeDocument/2006/relationships" xmlns:p="http://schemas.openxmlformats.org/presentationml/2006/main">
   <p:cSld>
     <p:spTree>
@@ -12952,7 +13514,15 @@
           <a:p>
             <a:r>
               <a:rPr lang="en-US" dirty="0"/>
-              <a:t>node *remove(node *head, int </a:t>
+              <a:t>void remove(node **</a:t>
+            </a:r>
+            <a:r>
+              <a:rPr lang="en-US" dirty="0" err="1"/>
+              <a:t>headp</a:t>
+            </a:r>
+            <a:r>
+              <a:rPr lang="en-US" dirty="0"/>
+              <a:t>, int </a:t>
             </a:r>
             <a:r>
               <a:rPr lang="en-US" dirty="0" err="1"/>
@@ -13539,74 +14109,6 @@
           </a:fontRef>
         </p:style>
       </p:cxnSp>
-      <p:cxnSp>
-        <p:nvCxnSpPr>
-          <p:cNvPr id="37" name="直线箭头连接符 46"/>
-          <p:cNvCxnSpPr/>
-          <p:nvPr/>
-        </p:nvCxnSpPr>
-        <p:spPr>
-          <a:xfrm flipV="1">
-            <a:off x="2011020" y="2457635"/>
-            <a:ext cx="0" cy="373764"/>
-          </a:xfrm>
-          <a:prstGeom prst="straightConnector1">
-            <a:avLst/>
-          </a:prstGeom>
-          <a:ln>
-            <a:tailEnd type="arrow"/>
-          </a:ln>
-        </p:spPr>
-        <p:style>
-          <a:lnRef idx="2">
-            <a:schemeClr val="dk1"/>
-          </a:lnRef>
-          <a:fillRef idx="0">
-            <a:schemeClr val="dk1"/>
-          </a:fillRef>
-          <a:effectRef idx="1">
-            <a:schemeClr val="dk1"/>
-          </a:effectRef>
-          <a:fontRef idx="minor">
-            <a:schemeClr val="tx1"/>
-          </a:fontRef>
-        </p:style>
-      </p:cxnSp>
-      <p:sp>
-        <p:nvSpPr>
-          <p:cNvPr id="38" name="矩形 49"/>
-          <p:cNvSpPr/>
-          <p:nvPr/>
-        </p:nvSpPr>
-        <p:spPr>
-          <a:xfrm>
-            <a:off x="1637655" y="2821641"/>
-            <a:ext cx="723425" cy="369332"/>
-          </a:xfrm>
-          <a:prstGeom prst="rect">
-            <a:avLst/>
-          </a:prstGeom>
-        </p:spPr>
-        <p:txBody>
-          <a:bodyPr wrap="none">
-            <a:spAutoFit/>
-          </a:bodyPr>
-          <a:lstStyle/>
-          <a:p>
-            <a:r>
-              <a:rPr lang="en-US" altLang="zh-CN" b="1" dirty="0">
-                <a:latin typeface="Arial"/>
-                <a:cs typeface="Arial"/>
-              </a:rPr>
-              <a:t>head</a:t>
-            </a:r>
-            <a:endParaRPr lang="zh-CN" altLang="en-US" dirty="0">
-              <a:latin typeface="Arial"/>
-              <a:cs typeface="Arial"/>
-            </a:endParaRPr>
-          </a:p>
-        </p:txBody>
-      </p:sp>
       <p:grpSp>
         <p:nvGrpSpPr>
           <p:cNvPr id="24" name="Group 23">
@@ -13919,7 +14421,7 @@
         <p:spPr>
           <a:xfrm>
             <a:off x="904792" y="4307923"/>
-            <a:ext cx="4218403" cy="2308324"/>
+            <a:ext cx="4218403" cy="2031325"/>
           </a:xfrm>
           <a:prstGeom prst="rect">
             <a:avLst/>
@@ -13950,7 +14452,7 @@
                   <a:srgbClr val="0432FF"/>
                 </a:solidFill>
               </a:rPr>
-              <a:t>       return head;</a:t>
+              <a:t>       return;</a:t>
             </a:r>
           </a:p>
           <a:p>
@@ -13986,31 +14488,23 @@
                   <a:srgbClr val="0432FF"/>
                 </a:solidFill>
               </a:rPr>
-              <a:t>      head = n-&gt;next;</a:t>
-            </a:r>
-          </a:p>
-          <a:p>
+              <a:t>      *</a:t>
+            </a:r>
+            <a:r>
+              <a:rPr lang="en-US" dirty="0" err="1">
+                <a:solidFill>
+                  <a:srgbClr val="0432FF"/>
+                </a:solidFill>
+              </a:rPr>
+              <a:t>headp</a:t>
+            </a:r>
             <a:r>
               <a:rPr lang="en-US" dirty="0">
                 <a:solidFill>
                   <a:srgbClr val="0432FF"/>
                 </a:solidFill>
               </a:rPr>
-              <a:t>else </a:t>
-            </a:r>
-          </a:p>
-          <a:p>
-            <a:r>
-              <a:rPr lang="en-US" dirty="0"/>
-              <a:t>      </a:t>
-            </a:r>
-            <a:r>
-              <a:rPr lang="en-US" dirty="0" err="1"/>
-              <a:t>pred</a:t>
-            </a:r>
-            <a:r>
-              <a:rPr lang="en-US" dirty="0"/>
-              <a:t>-&gt;next = n-&gt;next;</a:t>
+              <a:t> = n-&gt;next;</a:t>
             </a:r>
           </a:p>
           <a:p>
@@ -14020,7 +14514,21 @@
                   <a:srgbClr val="0432FF"/>
                 </a:solidFill>
               </a:rPr>
-              <a:t>free(n);</a:t>
+              <a:t>else </a:t>
+            </a:r>
+          </a:p>
+          <a:p>
+            <a:r>
+              <a:rPr lang="en-US" dirty="0"/>
+              <a:t>      </a:t>
+            </a:r>
+            <a:r>
+              <a:rPr lang="en-US" dirty="0" err="1"/>
+              <a:t>pred</a:t>
+            </a:r>
+            <a:r>
+              <a:rPr lang="en-US" dirty="0"/>
+              <a:t>-&gt;next = n-&gt;next;</a:t>
             </a:r>
           </a:p>
           <a:p>
@@ -14030,7 +14538,7 @@
                   <a:srgbClr val="0432FF"/>
                 </a:solidFill>
               </a:rPr>
-              <a:t>return head;</a:t>
+              <a:t>free(n);</a:t>
             </a:r>
           </a:p>
         </p:txBody>
@@ -14355,7 +14863,7 @@
 </p:sld>
 </file>
 
-<file path=ppt/slides/slide23.xml><?xml version="1.0" encoding="utf-8"?>
+<file path=ppt/slides/slide22.xml><?xml version="1.0" encoding="utf-8"?>
 <p:sld xmlns:a="http://schemas.openxmlformats.org/drawingml/2006/main" xmlns:r="http://schemas.openxmlformats.org/officeDocument/2006/relationships" xmlns:p="http://schemas.openxmlformats.org/presentationml/2006/main">
   <p:cSld>
     <p:spTree>
@@ -14877,7 +15385,7 @@
             </a:ln>
             <a:extLst>
               <a:ext uri="{909E8E84-426E-40dd-AFC4-6F175D3DCCD1}">
-                <a14:hiddenFill xmlns:a14="http://schemas.microsoft.com/office/drawing/2010/main" xmlns="">
+                <a14:hiddenFill xmlns="" xmlns:a14="http://schemas.microsoft.com/office/drawing/2010/main">
                   <a:noFill/>
                 </a14:hiddenFill>
               </a:ext>
@@ -14911,14 +15419,14 @@
             </a:ln>
             <a:extLst>
               <a:ext uri="{909E8E84-426E-40dd-AFC4-6F175D3DCCD1}">
-                <a14:hiddenFill xmlns:a14="http://schemas.microsoft.com/office/drawing/2010/main" xmlns="">
+                <a14:hiddenFill xmlns="" xmlns:a14="http://schemas.microsoft.com/office/drawing/2010/main">
                   <a:solidFill>
                     <a:srgbClr val="FFFFFF"/>
                   </a:solidFill>
                 </a14:hiddenFill>
               </a:ext>
               <a:ext uri="{91240B29-F687-4f45-9708-019B960494DF}">
-                <a14:hiddenLine xmlns:a14="http://schemas.microsoft.com/office/drawing/2010/main" xmlns="" w="9525">
+                <a14:hiddenLine xmlns="" xmlns:a14="http://schemas.microsoft.com/office/drawing/2010/main" w="9525">
                   <a:solidFill>
                     <a:srgbClr val="000000"/>
                   </a:solidFill>
@@ -15181,7 +15689,7 @@
             </a:ln>
             <a:extLst>
               <a:ext uri="{909E8E84-426E-40dd-AFC4-6F175D3DCCD1}">
-                <a14:hiddenFill xmlns:a14="http://schemas.microsoft.com/office/drawing/2010/main" xmlns="">
+                <a14:hiddenFill xmlns="" xmlns:a14="http://schemas.microsoft.com/office/drawing/2010/main">
                   <a:noFill/>
                 </a14:hiddenFill>
               </a:ext>
@@ -15221,14 +15729,14 @@
             </a:ln>
             <a:extLst>
               <a:ext uri="{909E8E84-426E-40dd-AFC4-6F175D3DCCD1}">
-                <a14:hiddenFill xmlns:a14="http://schemas.microsoft.com/office/drawing/2010/main" xmlns="">
+                <a14:hiddenFill xmlns="" xmlns:a14="http://schemas.microsoft.com/office/drawing/2010/main">
                   <a:solidFill>
                     <a:srgbClr val="FFFFFF"/>
                   </a:solidFill>
                 </a14:hiddenFill>
               </a:ext>
               <a:ext uri="{91240B29-F687-4f45-9708-019B960494DF}">
-                <a14:hiddenLine xmlns:a14="http://schemas.microsoft.com/office/drawing/2010/main" xmlns="" w="9525">
+                <a14:hiddenLine xmlns="" xmlns:a14="http://schemas.microsoft.com/office/drawing/2010/main" w="9525">
                   <a:solidFill>
                     <a:srgbClr val="000000"/>
                   </a:solidFill>
@@ -15470,7 +15978,7 @@
             </a:ln>
             <a:extLst>
               <a:ext uri="{909E8E84-426E-40dd-AFC4-6F175D3DCCD1}">
-                <a14:hiddenFill xmlns:a14="http://schemas.microsoft.com/office/drawing/2010/main" xmlns="">
+                <a14:hiddenFill xmlns="" xmlns:a14="http://schemas.microsoft.com/office/drawing/2010/main">
                   <a:noFill/>
                 </a14:hiddenFill>
               </a:ext>
@@ -16539,7 +17047,7 @@
           <a:p>
             <a:r>
               <a:rPr lang="en-US" dirty="0"/>
-              <a:t>void pointer</a:t>
+              <a:t>void * pointer</a:t>
             </a:r>
           </a:p>
         </p:txBody>
@@ -17868,12 +18376,6 @@
 </file>
 
 <file path=customXml/item1.xml><?xml version="1.0" encoding="utf-8"?>
-<p:properties xmlns:p="http://schemas.microsoft.com/office/2006/metadata/properties" xmlns:xsi="http://www.w3.org/2001/XMLSchema-instance" xmlns:pc="http://schemas.microsoft.com/office/infopath/2007/PartnerControls">
-  <documentManagement/>
-</p:properties>
-</file>
-
-<file path=customXml/item2.xml><?xml version="1.0" encoding="utf-8"?>
 <ct:contentTypeSchema xmlns:ct="http://schemas.microsoft.com/office/2006/metadata/contentType" xmlns:ma="http://schemas.microsoft.com/office/2006/metadata/properties/metaAttributes" ct:_="" ma:_="" ma:contentTypeName="Document" ma:contentTypeID="0x010100F230F55FC4E86843A38ABC983CBD33D2" ma:contentTypeVersion="2" ma:contentTypeDescription="Create a new document." ma:contentTypeScope="" ma:versionID="ea51d48ed41b66d32eb63de817eecbcd">
   <xsd:schema xmlns:xsd="http://www.w3.org/2001/XMLSchema" xmlns:xs="http://www.w3.org/2001/XMLSchema" xmlns:p="http://schemas.microsoft.com/office/2006/metadata/properties" xmlns:ns3="74d6482f-e53c-4fa7-ac87-951f9f66bd4c" targetNamespace="http://schemas.microsoft.com/office/2006/metadata/properties" ma:root="true" ma:fieldsID="128b5480a780b9585a060f8329b1fff7" ns3:_="">
     <xsd:import namespace="74d6482f-e53c-4fa7-ac87-951f9f66bd4c"/>
@@ -18005,6 +18507,12 @@
 </ct:contentTypeSchema>
 </file>
 
+<file path=customXml/item2.xml><?xml version="1.0" encoding="utf-8"?>
+<p:properties xmlns:p="http://schemas.microsoft.com/office/2006/metadata/properties" xmlns:xsi="http://www.w3.org/2001/XMLSchema-instance" xmlns:pc="http://schemas.microsoft.com/office/infopath/2007/PartnerControls">
+  <documentManagement/>
+</p:properties>
+</file>
+
 <file path=customXml/item3.xml><?xml version="1.0" encoding="utf-8"?>
 <?mso-contentType ?>
 <FormTemplates xmlns="http://schemas.microsoft.com/sharepoint/v3/contenttype/forms">
@@ -18015,22 +18523,6 @@
 </file>
 
 <file path=customXml/itemProps1.xml><?xml version="1.0" encoding="utf-8"?>
-<ds:datastoreItem xmlns:ds="http://schemas.openxmlformats.org/officeDocument/2006/customXml" ds:itemID="{908B740D-AB21-43E0-B1F8-69FB41A97CFE}">
-  <ds:schemaRefs>
-    <ds:schemaRef ds:uri="http://schemas.microsoft.com/office/infopath/2007/PartnerControls"/>
-    <ds:schemaRef ds:uri="http://purl.org/dc/terms/"/>
-    <ds:schemaRef ds:uri="http://purl.org/dc/elements/1.1/"/>
-    <ds:schemaRef ds:uri="http://purl.org/dc/dcmitype/"/>
-    <ds:schemaRef ds:uri="http://schemas.microsoft.com/office/2006/documentManagement/types"/>
-    <ds:schemaRef ds:uri="74d6482f-e53c-4fa7-ac87-951f9f66bd4c"/>
-    <ds:schemaRef ds:uri="http://schemas.microsoft.com/office/2006/metadata/properties"/>
-    <ds:schemaRef ds:uri="http://schemas.openxmlformats.org/package/2006/metadata/core-properties"/>
-    <ds:schemaRef ds:uri="http://www.w3.org/XML/1998/namespace"/>
-  </ds:schemaRefs>
-</ds:datastoreItem>
-</file>
-
-<file path=customXml/itemProps2.xml><?xml version="1.0" encoding="utf-8"?>
 <ds:datastoreItem xmlns:ds="http://schemas.openxmlformats.org/officeDocument/2006/customXml" ds:itemID="{B1227868-FD94-4122-B90C-2FB375A0A8E0}">
   <ds:schemaRefs>
     <ds:schemaRef ds:uri="http://schemas.microsoft.com/office/2006/metadata/contentType"/>
@@ -18049,6 +18541,22 @@
 </ds:datastoreItem>
 </file>
 
+<file path=customXml/itemProps2.xml><?xml version="1.0" encoding="utf-8"?>
+<ds:datastoreItem xmlns:ds="http://schemas.openxmlformats.org/officeDocument/2006/customXml" ds:itemID="{908B740D-AB21-43E0-B1F8-69FB41A97CFE}">
+  <ds:schemaRefs>
+    <ds:schemaRef ds:uri="http://schemas.microsoft.com/office/2006/documentManagement/types"/>
+    <ds:schemaRef ds:uri="http://schemas.microsoft.com/office/2006/metadata/properties"/>
+    <ds:schemaRef ds:uri="http://purl.org/dc/dcmitype/"/>
+    <ds:schemaRef ds:uri="http://www.w3.org/XML/1998/namespace"/>
+    <ds:schemaRef ds:uri="74d6482f-e53c-4fa7-ac87-951f9f66bd4c"/>
+    <ds:schemaRef ds:uri="http://purl.org/dc/terms/"/>
+    <ds:schemaRef ds:uri="http://schemas.microsoft.com/office/infopath/2007/PartnerControls"/>
+    <ds:schemaRef ds:uri="http://schemas.openxmlformats.org/package/2006/metadata/core-properties"/>
+    <ds:schemaRef ds:uri="http://purl.org/dc/elements/1.1/"/>
+  </ds:schemaRefs>
+</ds:datastoreItem>
+</file>
+
 <file path=customXml/itemProps3.xml><?xml version="1.0" encoding="utf-8"?>
 <ds:datastoreItem xmlns:ds="http://schemas.openxmlformats.org/officeDocument/2006/customXml" ds:itemID="{7952D454-F99B-4B98-8368-72489BAA5CBE}">
   <ds:schemaRefs>

--- a/notes/06-struct-malloc.pptx
+++ b/notes/06-struct-malloc.pptx
@@ -147,7 +147,7 @@
 <file path=ppt/revisionInfo.xml><?xml version="1.0" encoding="utf-8"?>
 <p1510:revInfo xmlns:a="http://schemas.openxmlformats.org/drawingml/2006/main" xmlns:r="http://schemas.openxmlformats.org/officeDocument/2006/relationships" xmlns:p1510="http://schemas.microsoft.com/office/powerpoint/2015/10/main">
   <p1510:revLst>
-    <p1510:client id="{B40D29FE-EAFE-DA45-8968-B49E0D5829D1}" v="79" dt="2026-09-30T21:45:23.470"/>
+    <p1510:client id="{B40D29FE-EAFE-DA45-8968-B49E0D5829D1}" v="99" dt="2026-10-05T16:15:40.379"/>
   </p1510:revLst>
 </p1510:revInfo>
 </file>
@@ -331,7 +331,7 @@
           <a:p>
             <a:fld id="{6F998A3A-B3F1-C640-8709-1356562CC12B}" type="datetimeFigureOut">
               <a:rPr lang="en-US" smtClean="0"/>
-              <a:t>9/30/26</a:t>
+              <a:t>10/5/26</a:t>
             </a:fld>
             <a:endParaRPr lang="en-US"/>
           </a:p>
@@ -499,7 +499,7 @@
           <a:p>
             <a:fld id="{6F998A3A-B3F1-C640-8709-1356562CC12B}" type="datetimeFigureOut">
               <a:rPr lang="en-US" smtClean="0"/>
-              <a:t>9/30/26</a:t>
+              <a:t>10/5/26</a:t>
             </a:fld>
             <a:endParaRPr lang="en-US"/>
           </a:p>
@@ -677,7 +677,7 @@
           <a:p>
             <a:fld id="{6F998A3A-B3F1-C640-8709-1356562CC12B}" type="datetimeFigureOut">
               <a:rPr lang="en-US" smtClean="0"/>
-              <a:t>9/30/26</a:t>
+              <a:t>10/5/26</a:t>
             </a:fld>
             <a:endParaRPr lang="en-US"/>
           </a:p>
@@ -845,7 +845,7 @@
           <a:p>
             <a:fld id="{6F998A3A-B3F1-C640-8709-1356562CC12B}" type="datetimeFigureOut">
               <a:rPr lang="en-US" smtClean="0"/>
-              <a:t>9/30/26</a:t>
+              <a:t>10/5/26</a:t>
             </a:fld>
             <a:endParaRPr lang="en-US"/>
           </a:p>
@@ -1090,7 +1090,7 @@
           <a:p>
             <a:fld id="{6F998A3A-B3F1-C640-8709-1356562CC12B}" type="datetimeFigureOut">
               <a:rPr lang="en-US" smtClean="0"/>
-              <a:t>9/30/26</a:t>
+              <a:t>10/5/26</a:t>
             </a:fld>
             <a:endParaRPr lang="en-US"/>
           </a:p>
@@ -1375,7 +1375,7 @@
           <a:p>
             <a:fld id="{6F998A3A-B3F1-C640-8709-1356562CC12B}" type="datetimeFigureOut">
               <a:rPr lang="en-US" smtClean="0"/>
-              <a:t>9/30/26</a:t>
+              <a:t>10/5/26</a:t>
             </a:fld>
             <a:endParaRPr lang="en-US"/>
           </a:p>
@@ -1794,7 +1794,7 @@
           <a:p>
             <a:fld id="{6F998A3A-B3F1-C640-8709-1356562CC12B}" type="datetimeFigureOut">
               <a:rPr lang="en-US" smtClean="0"/>
-              <a:t>9/30/26</a:t>
+              <a:t>10/5/26</a:t>
             </a:fld>
             <a:endParaRPr lang="en-US"/>
           </a:p>
@@ -1911,7 +1911,7 @@
           <a:p>
             <a:fld id="{6F998A3A-B3F1-C640-8709-1356562CC12B}" type="datetimeFigureOut">
               <a:rPr lang="en-US" smtClean="0"/>
-              <a:t>9/30/26</a:t>
+              <a:t>10/5/26</a:t>
             </a:fld>
             <a:endParaRPr lang="en-US"/>
           </a:p>
@@ -2006,7 +2006,7 @@
           <a:p>
             <a:fld id="{6F998A3A-B3F1-C640-8709-1356562CC12B}" type="datetimeFigureOut">
               <a:rPr lang="en-US" smtClean="0"/>
-              <a:t>9/30/26</a:t>
+              <a:t>10/5/26</a:t>
             </a:fld>
             <a:endParaRPr lang="en-US"/>
           </a:p>
@@ -2281,7 +2281,7 @@
           <a:p>
             <a:fld id="{6F998A3A-B3F1-C640-8709-1356562CC12B}" type="datetimeFigureOut">
               <a:rPr lang="en-US" smtClean="0"/>
-              <a:t>9/30/26</a:t>
+              <a:t>10/5/26</a:t>
             </a:fld>
             <a:endParaRPr lang="en-US"/>
           </a:p>
@@ -2533,7 +2533,7 @@
           <a:p>
             <a:fld id="{6F998A3A-B3F1-C640-8709-1356562CC12B}" type="datetimeFigureOut">
               <a:rPr lang="en-US" smtClean="0"/>
-              <a:t>9/30/26</a:t>
+              <a:t>10/5/26</a:t>
             </a:fld>
             <a:endParaRPr lang="en-US"/>
           </a:p>
@@ -2744,7 +2744,7 @@
           <a:p>
             <a:fld id="{6F998A3A-B3F1-C640-8709-1356562CC12B}" type="datetimeFigureOut">
               <a:rPr lang="en-US" smtClean="0"/>
-              <a:t>9/30/26</a:t>
+              <a:t>10/5/26</a:t>
             </a:fld>
             <a:endParaRPr lang="en-US"/>
           </a:p>
@@ -6598,8 +6598,8 @@
         </p:nvSpPr>
         <p:spPr>
           <a:xfrm>
-            <a:off x="757003" y="3235995"/>
-            <a:ext cx="997389" cy="369332"/>
+            <a:off x="854653" y="3250373"/>
+            <a:ext cx="822661" cy="369332"/>
           </a:xfrm>
           <a:prstGeom prst="rect">
             <a:avLst/>
@@ -6621,12 +6621,8 @@
           <a:lstStyle/>
           <a:p>
             <a:r>
-              <a:rPr lang="en-US" dirty="0" err="1"/>
-              <a:t>headp</a:t>
-            </a:r>
-            <a:r>
               <a:rPr lang="en-US" dirty="0"/>
-              <a:t>:   </a:t>
+              <a:t>head:  </a:t>
             </a:r>
           </a:p>
         </p:txBody>
@@ -6704,21 +6700,7 @@
                 <a:latin typeface="Consolas"/>
                 <a:cs typeface="Consolas"/>
               </a:rPr>
-              <a:t>node *find(node *</a:t>
-            </a:r>
-            <a:r>
-              <a:rPr lang="en-US" altLang="zh-CN" sz="1800" dirty="0" err="1">
-                <a:latin typeface="Consolas"/>
-                <a:cs typeface="Consolas"/>
-              </a:rPr>
-              <a:t>headp</a:t>
-            </a:r>
-            <a:r>
-              <a:rPr lang="en-US" altLang="zh-CN" sz="1800" dirty="0">
-                <a:latin typeface="Consolas"/>
-                <a:cs typeface="Consolas"/>
-              </a:rPr>
-              <a:t>, int </a:t>
+              <a:t>node *find(node *head, int </a:t>
             </a:r>
             <a:r>
               <a:rPr lang="en-US" altLang="zh-CN" sz="1800" dirty="0" err="1">
@@ -6904,7 +6886,7 @@
         <p:spPr>
           <a:xfrm>
             <a:off x="1092080" y="4441808"/>
-            <a:ext cx="2210862" cy="369332"/>
+            <a:ext cx="2084225" cy="369332"/>
           </a:xfrm>
           <a:prstGeom prst="rect">
             <a:avLst/>
@@ -6921,19 +6903,7 @@
               <a:rPr lang="en-US" dirty="0">
                 <a:latin typeface="Consolas" panose="020B0609020204030204" pitchFamily="49" charset="0"/>
               </a:rPr>
-              <a:t>node *n = </a:t>
-            </a:r>
-            <a:r>
-              <a:rPr lang="en-US" dirty="0" err="1">
-                <a:latin typeface="Consolas" panose="020B0609020204030204" pitchFamily="49" charset="0"/>
-              </a:rPr>
-              <a:t>headp</a:t>
-            </a:r>
-            <a:r>
-              <a:rPr lang="en-US" dirty="0">
-                <a:latin typeface="Consolas" panose="020B0609020204030204" pitchFamily="49" charset="0"/>
-              </a:rPr>
-              <a:t>;</a:t>
+              <a:t>node *n = head;</a:t>
             </a:r>
           </a:p>
         </p:txBody>
@@ -7234,7 +7204,7 @@
         <p:spPr>
           <a:xfrm>
             <a:off x="652756" y="1254612"/>
-            <a:ext cx="8120541" cy="5016758"/>
+            <a:ext cx="8120541" cy="4739759"/>
           </a:xfrm>
           <a:prstGeom prst="rect">
             <a:avLst/>
@@ -7279,38 +7249,6 @@
           </a:p>
           <a:p>
             <a:r>
-              <a:rPr lang="en-US" altLang="zh-CN" dirty="0">
-                <a:solidFill>
-                  <a:srgbClr val="0000FF"/>
-                </a:solidFill>
-                <a:latin typeface="Consolas"/>
-                <a:cs typeface="Consolas"/>
-              </a:rPr>
-              <a:t>// modify head pointer pointed to by </a:t>
-            </a:r>
-            <a:r>
-              <a:rPr lang="en-US" altLang="zh-CN" dirty="0" err="1">
-                <a:solidFill>
-                  <a:srgbClr val="0000FF"/>
-                </a:solidFill>
-                <a:latin typeface="Consolas"/>
-                <a:cs typeface="Consolas"/>
-              </a:rPr>
-              <a:t>headp</a:t>
-            </a:r>
-            <a:r>
-              <a:rPr lang="en-US" altLang="zh-CN" dirty="0">
-                <a:solidFill>
-                  <a:srgbClr val="0000FF"/>
-                </a:solidFill>
-                <a:latin typeface="Consolas"/>
-                <a:cs typeface="Consolas"/>
-              </a:rPr>
-              <a:t> </a:t>
-            </a:r>
-          </a:p>
-          <a:p>
-            <a:r>
               <a:rPr lang="en-US" altLang="zh-CN" sz="2000" dirty="0">
                 <a:latin typeface="Consolas"/>
                 <a:cs typeface="Consolas"/>
@@ -7329,21 +7267,7 @@
                 <a:latin typeface="Consolas"/>
                 <a:cs typeface="Consolas"/>
               </a:rPr>
-              <a:t>(node *</a:t>
-            </a:r>
-            <a:r>
-              <a:rPr lang="en-US" altLang="zh-CN" sz="2000" dirty="0" err="1">
-                <a:latin typeface="Consolas"/>
-                <a:cs typeface="Consolas"/>
-              </a:rPr>
-              <a:t>headp</a:t>
-            </a:r>
-            <a:r>
-              <a:rPr lang="en-US" altLang="zh-CN" sz="2000" dirty="0">
-                <a:latin typeface="Consolas"/>
-                <a:cs typeface="Consolas"/>
-              </a:rPr>
-              <a:t>, int </a:t>
+              <a:t>(node *head, int </a:t>
             </a:r>
             <a:r>
               <a:rPr lang="en-US" altLang="zh-CN" sz="2000" dirty="0" err="1">
@@ -7433,45 +7357,59 @@
                 <a:latin typeface="Consolas"/>
                 <a:cs typeface="Consolas"/>
               </a:rPr>
-              <a:t>    node *</a:t>
+              <a:t>    node *head = NULL;</a:t>
+            </a:r>
+          </a:p>
+          <a:p>
+            <a:pPr lvl="1"/>
+            <a:r>
+              <a:rPr lang="en-US" altLang="zh-CN" sz="2000" dirty="0">
+                <a:latin typeface="Consolas"/>
+                <a:cs typeface="Consolas"/>
+              </a:rPr>
+              <a:t> for (</a:t>
             </a:r>
             <a:r>
               <a:rPr lang="en-US" altLang="zh-CN" sz="2000" dirty="0" err="1">
                 <a:latin typeface="Consolas"/>
                 <a:cs typeface="Consolas"/>
               </a:rPr>
-              <a:t>headp</a:t>
+              <a:t>int</a:t>
             </a:r>
             <a:r>
               <a:rPr lang="en-US" altLang="zh-CN" sz="2000" dirty="0">
                 <a:latin typeface="Consolas"/>
                 <a:cs typeface="Consolas"/>
               </a:rPr>
-              <a:t> = NULL;</a:t>
-            </a:r>
-          </a:p>
-          <a:p>
-            <a:pPr lvl="1"/>
+              <a:t> </a:t>
+            </a:r>
+            <a:r>
+              <a:rPr lang="en-US" altLang="zh-CN" sz="2000" dirty="0" err="1">
+                <a:latin typeface="Consolas"/>
+                <a:cs typeface="Consolas"/>
+              </a:rPr>
+              <a:t>i</a:t>
+            </a:r>
             <a:r>
               <a:rPr lang="en-US" altLang="zh-CN" sz="2000" dirty="0">
                 <a:latin typeface="Consolas"/>
                 <a:cs typeface="Consolas"/>
               </a:rPr>
-              <a:t> for (</a:t>
+              <a:t> = 0; </a:t>
             </a:r>
             <a:r>
               <a:rPr lang="en-US" altLang="zh-CN" sz="2000" dirty="0" err="1">
                 <a:latin typeface="Consolas"/>
                 <a:cs typeface="Consolas"/>
               </a:rPr>
-              <a:t>int</a:t>
+              <a:t>i</a:t>
             </a:r>
             <a:r>
               <a:rPr lang="en-US" altLang="zh-CN" sz="2000" dirty="0">
                 <a:latin typeface="Consolas"/>
                 <a:cs typeface="Consolas"/>
               </a:rPr>
-              <a:t> </a:t>
+              <a:t> &lt; 3; </a:t>
             </a:r>
             <a:r>
               <a:rPr lang="en-US" altLang="zh-CN" sz="2000" dirty="0" err="1">
@@ -7485,87 +7423,31 @@
                 <a:latin typeface="Consolas"/>
                 <a:cs typeface="Consolas"/>
               </a:rPr>
-              <a:t> = 0; </a:t>
+              <a:t>++) </a:t>
+            </a:r>
+          </a:p>
+          <a:p>
+            <a:pPr lvl="1"/>
+            <a:r>
+              <a:rPr lang="en-US" altLang="zh-CN" sz="2000" dirty="0">
+                <a:latin typeface="Consolas"/>
+                <a:cs typeface="Consolas"/>
+              </a:rPr>
+              <a:t>    </a:t>
             </a:r>
             <a:r>
               <a:rPr lang="en-US" altLang="zh-CN" sz="2000" dirty="0" err="1">
                 <a:latin typeface="Consolas"/>
                 <a:cs typeface="Consolas"/>
               </a:rPr>
-              <a:t>i</a:t>
+              <a:t>insert_front</a:t>
             </a:r>
             <a:r>
               <a:rPr lang="en-US" altLang="zh-CN" sz="2000" dirty="0">
                 <a:latin typeface="Consolas"/>
                 <a:cs typeface="Consolas"/>
               </a:rPr>
-              <a:t> &lt; 3; </a:t>
-            </a:r>
-            <a:r>
-              <a:rPr lang="en-US" altLang="zh-CN" sz="2000" dirty="0" err="1">
-                <a:latin typeface="Consolas"/>
-                <a:cs typeface="Consolas"/>
-              </a:rPr>
-              <a:t>i</a:t>
-            </a:r>
-            <a:r>
-              <a:rPr lang="en-US" altLang="zh-CN" sz="2000" dirty="0">
-                <a:latin typeface="Consolas"/>
-                <a:cs typeface="Consolas"/>
-              </a:rPr>
-              <a:t>++) </a:t>
-            </a:r>
-          </a:p>
-          <a:p>
-            <a:pPr lvl="1"/>
-            <a:r>
-              <a:rPr lang="en-US" altLang="zh-CN" sz="2000" dirty="0">
-                <a:latin typeface="Consolas"/>
-                <a:cs typeface="Consolas"/>
-              </a:rPr>
-              <a:t>    </a:t>
-            </a:r>
-            <a:r>
-              <a:rPr lang="en-US" altLang="zh-CN" sz="2000" dirty="0" err="1">
-                <a:latin typeface="Consolas"/>
-                <a:cs typeface="Consolas"/>
-              </a:rPr>
-              <a:t>headp</a:t>
-            </a:r>
-            <a:r>
-              <a:rPr lang="en-US" altLang="zh-CN" sz="2000" dirty="0">
-                <a:latin typeface="Consolas"/>
-                <a:cs typeface="Consolas"/>
-              </a:rPr>
-              <a:t> = </a:t>
-            </a:r>
-            <a:r>
-              <a:rPr lang="en-US" altLang="zh-CN" sz="2000" dirty="0" err="1">
-                <a:latin typeface="Consolas"/>
-                <a:cs typeface="Consolas"/>
-              </a:rPr>
-              <a:t>insert_front</a:t>
-            </a:r>
-            <a:r>
-              <a:rPr lang="en-US" altLang="zh-CN" sz="2000" dirty="0">
-                <a:latin typeface="Consolas"/>
-                <a:cs typeface="Consolas"/>
-              </a:rPr>
-              <a:t>(</a:t>
-            </a:r>
-            <a:r>
-              <a:rPr lang="en-US" altLang="zh-CN" sz="2000" dirty="0" err="1">
-                <a:latin typeface="Consolas"/>
-                <a:cs typeface="Consolas"/>
-              </a:rPr>
-              <a:t>headp</a:t>
-            </a:r>
-            <a:r>
-              <a:rPr lang="en-US" altLang="zh-CN" sz="2000" dirty="0">
-                <a:latin typeface="Consolas"/>
-                <a:cs typeface="Consolas"/>
-              </a:rPr>
-              <a:t>, </a:t>
+              <a:t>(head  , </a:t>
             </a:r>
             <a:r>
               <a:rPr lang="en-US" altLang="zh-CN" sz="2000" dirty="0" err="1">
@@ -7601,93 +7483,10 @@
       </p:sp>
       <p:sp>
         <p:nvSpPr>
-          <p:cNvPr id="3" name="TextBox 2"/>
-          <p:cNvSpPr txBox="1"/>
-          <p:nvPr/>
-        </p:nvSpPr>
-        <p:spPr>
-          <a:xfrm>
-            <a:off x="710612" y="1802056"/>
-            <a:ext cx="5980541" cy="400110"/>
-          </a:xfrm>
-          <a:prstGeom prst="rect">
-            <a:avLst/>
-          </a:prstGeom>
-          <a:solidFill>
-            <a:schemeClr val="bg1">
-              <a:lumMod val="95000"/>
-            </a:schemeClr>
-          </a:solidFill>
-        </p:spPr>
-        <p:txBody>
-          <a:bodyPr wrap="square" rtlCol="0">
-            <a:spAutoFit/>
-          </a:bodyPr>
-          <a:lstStyle/>
-          <a:p>
-            <a:r>
-              <a:rPr lang="en-US" sz="2000" dirty="0">
-                <a:latin typeface="Consolas" panose="020B0609020204030204" pitchFamily="49" charset="0"/>
-              </a:rPr>
-              <a:t>void </a:t>
-            </a:r>
-            <a:r>
-              <a:rPr lang="en-US" sz="2000" dirty="0" err="1">
-                <a:latin typeface="Consolas" panose="020B0609020204030204" pitchFamily="49" charset="0"/>
-              </a:rPr>
-              <a:t>insert_front</a:t>
-            </a:r>
-            <a:r>
-              <a:rPr lang="en-US" sz="2000" dirty="0">
-                <a:latin typeface="Consolas" panose="020B0609020204030204" pitchFamily="49" charset="0"/>
-              </a:rPr>
-              <a:t>(</a:t>
-            </a:r>
-            <a:r>
-              <a:rPr lang="en-US" sz="2000" dirty="0">
-                <a:highlight>
-                  <a:srgbClr val="FFFF00"/>
-                </a:highlight>
-                <a:latin typeface="Consolas" panose="020B0609020204030204" pitchFamily="49" charset="0"/>
-              </a:rPr>
-              <a:t>node **</a:t>
-            </a:r>
-            <a:r>
-              <a:rPr lang="en-US" sz="2000" dirty="0" err="1">
-                <a:highlight>
-                  <a:srgbClr val="FFFF00"/>
-                </a:highlight>
-                <a:latin typeface="Consolas" panose="020B0609020204030204" pitchFamily="49" charset="0"/>
-              </a:rPr>
-              <a:t>headp</a:t>
-            </a:r>
-            <a:r>
-              <a:rPr lang="en-US" sz="2000" dirty="0">
-                <a:latin typeface="Consolas" panose="020B0609020204030204" pitchFamily="49" charset="0"/>
-              </a:rPr>
-              <a:t>, int </a:t>
-            </a:r>
-            <a:r>
-              <a:rPr lang="en-US" sz="2000" dirty="0" err="1">
-                <a:latin typeface="Consolas" panose="020B0609020204030204" pitchFamily="49" charset="0"/>
-              </a:rPr>
-              <a:t>val</a:t>
-            </a:r>
-            <a:r>
-              <a:rPr lang="en-US" sz="2000" dirty="0">
-                <a:latin typeface="Consolas" panose="020B0609020204030204" pitchFamily="49" charset="0"/>
-              </a:rPr>
-              <a:t>) </a:t>
-            </a:r>
-          </a:p>
-        </p:txBody>
-      </p:sp>
-      <p:sp>
-        <p:nvSpPr>
-          <p:cNvPr id="6" name="TextBox 5">
+          <p:cNvPr id="5" name="TextBox 4">
             <a:extLst>
               <a:ext uri="{FF2B5EF4-FFF2-40B4-BE49-F238E27FC236}">
-                <a16:creationId xmlns:a16="http://schemas.microsoft.com/office/drawing/2014/main" id="{E04F03A8-5123-4247-A5FF-B586CC12DD72}"/>
+                <a16:creationId xmlns:a16="http://schemas.microsoft.com/office/drawing/2014/main" id="{F41A046E-3C3E-18A3-B509-C34714DD73AB}"/>
               </a:ext>
             </a:extLst>
           </p:cNvPr>
@@ -7696,66 +7495,74 @@
         </p:nvSpPr>
         <p:spPr>
           <a:xfrm>
-            <a:off x="1711687" y="5203278"/>
-            <a:ext cx="4437698" cy="400110"/>
+            <a:off x="3585350" y="4906941"/>
+            <a:ext cx="788036" cy="400110"/>
           </a:xfrm>
           <a:prstGeom prst="rect">
             <a:avLst/>
           </a:prstGeom>
           <a:solidFill>
-            <a:schemeClr val="bg1">
-              <a:lumMod val="95000"/>
-            </a:schemeClr>
+            <a:srgbClr val="FFFF00"/>
           </a:solidFill>
+          <a:ln>
+            <a:noFill/>
+          </a:ln>
         </p:spPr>
         <p:txBody>
-          <a:bodyPr wrap="square" rtlCol="0">
+          <a:bodyPr wrap="none" rIns="0" rtlCol="0">
             <a:spAutoFit/>
           </a:bodyPr>
           <a:lstStyle/>
           <a:p>
             <a:r>
-              <a:rPr lang="en-US" sz="2000" dirty="0" err="1">
-                <a:latin typeface="Consolas" panose="020B0609020204030204" pitchFamily="49" charset="0"/>
-              </a:rPr>
-              <a:t>insert_front</a:t>
-            </a:r>
-            <a:r>
-              <a:rPr lang="en-US" sz="2000" dirty="0">
-                <a:highlight>
-                  <a:srgbClr val="FFFF00"/>
-                </a:highlight>
-                <a:latin typeface="Consolas" panose="020B0609020204030204" pitchFamily="49" charset="0"/>
-              </a:rPr>
-              <a:t>(&amp;</a:t>
-            </a:r>
-            <a:r>
-              <a:rPr lang="en-US" sz="2000" dirty="0" err="1">
-                <a:highlight>
-                  <a:srgbClr val="FFFF00"/>
-                </a:highlight>
-                <a:latin typeface="Consolas" panose="020B0609020204030204" pitchFamily="49" charset="0"/>
-              </a:rPr>
+              <a:rPr lang="en-US" sz="2000" dirty="0"/>
+              <a:t>&amp;head</a:t>
+            </a:r>
+          </a:p>
+        </p:txBody>
+      </p:sp>
+      <p:sp>
+        <p:nvSpPr>
+          <p:cNvPr id="7" name="TextBox 6">
+            <a:extLst>
+              <a:ext uri="{FF2B5EF4-FFF2-40B4-BE49-F238E27FC236}">
+                <a16:creationId xmlns:a16="http://schemas.microsoft.com/office/drawing/2014/main" id="{59CF15C8-D0B7-91F9-9A58-178965B0D8AE}"/>
+              </a:ext>
+            </a:extLst>
+          </p:cNvPr>
+          <p:cNvSpPr txBox="1"/>
+          <p:nvPr/>
+        </p:nvSpPr>
+        <p:spPr>
+          <a:xfrm>
+            <a:off x="3331077" y="1550950"/>
+            <a:ext cx="1594347" cy="400110"/>
+          </a:xfrm>
+          <a:prstGeom prst="rect">
+            <a:avLst/>
+          </a:prstGeom>
+          <a:solidFill>
+            <a:srgbClr val="FFFF00"/>
+          </a:solidFill>
+          <a:ln>
+            <a:noFill/>
+          </a:ln>
+        </p:spPr>
+        <p:txBody>
+          <a:bodyPr wrap="none" rIns="0" rtlCol="0">
+            <a:spAutoFit/>
+          </a:bodyPr>
+          <a:lstStyle/>
+          <a:p>
+            <a:r>
+              <a:rPr lang="en-US" sz="2000" dirty="0"/>
+              <a:t>node **</a:t>
+            </a:r>
+            <a:r>
+              <a:rPr lang="en-US" sz="2000" dirty="0" err="1"/>
               <a:t>headp</a:t>
             </a:r>
-            <a:r>
-              <a:rPr lang="en-US" sz="2000" dirty="0">
-                <a:latin typeface="Consolas" panose="020B0609020204030204" pitchFamily="49" charset="0"/>
-              </a:rPr>
-              <a:t>, </a:t>
-            </a:r>
-            <a:r>
-              <a:rPr lang="en-US" sz="2000" dirty="0" err="1">
-                <a:latin typeface="Consolas" panose="020B0609020204030204" pitchFamily="49" charset="0"/>
-              </a:rPr>
-              <a:t>i</a:t>
-            </a:r>
-            <a:r>
-              <a:rPr lang="en-US" sz="2000" dirty="0">
-                <a:latin typeface="Consolas" panose="020B0609020204030204" pitchFamily="49" charset="0"/>
-              </a:rPr>
-              <a:t>);</a:t>
-            </a:r>
+            <a:endParaRPr lang="en-US" sz="2000" dirty="0"/>
           </a:p>
         </p:txBody>
       </p:sp>
@@ -7769,6 +7576,130 @@
   <p:clrMapOvr>
     <a:masterClrMapping/>
   </p:clrMapOvr>
+  <p:timing>
+    <p:tnLst>
+      <p:par>
+        <p:cTn id="1" dur="indefinite" restart="never" nodeType="tmRoot">
+          <p:childTnLst>
+            <p:seq concurrent="1" nextAc="seek">
+              <p:cTn id="2" dur="indefinite" nodeType="mainSeq">
+                <p:childTnLst>
+                  <p:par>
+                    <p:cTn id="3" fill="hold">
+                      <p:stCondLst>
+                        <p:cond delay="indefinite"/>
+                      </p:stCondLst>
+                      <p:childTnLst>
+                        <p:par>
+                          <p:cTn id="4" fill="hold">
+                            <p:stCondLst>
+                              <p:cond delay="0"/>
+                            </p:stCondLst>
+                            <p:childTnLst>
+                              <p:par>
+                                <p:cTn id="5" presetID="1" presetClass="entr" presetSubtype="0" fill="hold" grpId="0" nodeType="clickEffect">
+                                  <p:stCondLst>
+                                    <p:cond delay="0"/>
+                                  </p:stCondLst>
+                                  <p:childTnLst>
+                                    <p:set>
+                                      <p:cBhvr>
+                                        <p:cTn id="6" dur="1" fill="hold">
+                                          <p:stCondLst>
+                                            <p:cond delay="0"/>
+                                          </p:stCondLst>
+                                        </p:cTn>
+                                        <p:tgtEl>
+                                          <p:spTgt spid="5"/>
+                                        </p:tgtEl>
+                                        <p:attrNameLst>
+                                          <p:attrName>style.visibility</p:attrName>
+                                        </p:attrNameLst>
+                                      </p:cBhvr>
+                                      <p:to>
+                                        <p:strVal val="visible"/>
+                                      </p:to>
+                                    </p:set>
+                                  </p:childTnLst>
+                                </p:cTn>
+                              </p:par>
+                            </p:childTnLst>
+                          </p:cTn>
+                        </p:par>
+                      </p:childTnLst>
+                    </p:cTn>
+                  </p:par>
+                  <p:par>
+                    <p:cTn id="7" fill="hold">
+                      <p:stCondLst>
+                        <p:cond delay="indefinite"/>
+                      </p:stCondLst>
+                      <p:childTnLst>
+                        <p:par>
+                          <p:cTn id="8" fill="hold">
+                            <p:stCondLst>
+                              <p:cond delay="0"/>
+                            </p:stCondLst>
+                            <p:childTnLst>
+                              <p:par>
+                                <p:cTn id="9" presetID="1" presetClass="entr" presetSubtype="0" fill="hold" grpId="0" nodeType="clickEffect">
+                                  <p:stCondLst>
+                                    <p:cond delay="0"/>
+                                  </p:stCondLst>
+                                  <p:childTnLst>
+                                    <p:set>
+                                      <p:cBhvr>
+                                        <p:cTn id="10" dur="1" fill="hold">
+                                          <p:stCondLst>
+                                            <p:cond delay="0"/>
+                                          </p:stCondLst>
+                                        </p:cTn>
+                                        <p:tgtEl>
+                                          <p:spTgt spid="7"/>
+                                        </p:tgtEl>
+                                        <p:attrNameLst>
+                                          <p:attrName>style.visibility</p:attrName>
+                                        </p:attrNameLst>
+                                      </p:cBhvr>
+                                      <p:to>
+                                        <p:strVal val="visible"/>
+                                      </p:to>
+                                    </p:set>
+                                  </p:childTnLst>
+                                </p:cTn>
+                              </p:par>
+                            </p:childTnLst>
+                          </p:cTn>
+                        </p:par>
+                      </p:childTnLst>
+                    </p:cTn>
+                  </p:par>
+                </p:childTnLst>
+              </p:cTn>
+              <p:prevCondLst>
+                <p:cond evt="onPrev" delay="0">
+                  <p:tgtEl>
+                    <p:sldTgt/>
+                  </p:tgtEl>
+                </p:cond>
+              </p:prevCondLst>
+              <p:nextCondLst>
+                <p:cond evt="onNext" delay="0">
+                  <p:tgtEl>
+                    <p:sldTgt/>
+                  </p:tgtEl>
+                </p:cond>
+              </p:nextCondLst>
+            </p:seq>
+          </p:childTnLst>
+        </p:cTn>
+      </p:par>
+    </p:tnLst>
+    <p:bldLst>
+      <p:bldP spid="5" grpId="0" animBg="1"/>
+      <p:bldP spid="7" grpId="0" animBg="1"/>
+    </p:bldLst>
+  </p:timing>
 </p:sld>
 </file>
 
@@ -9115,7 +9046,7 @@
         </p:nvSpPr>
         <p:spPr>
           <a:xfrm>
-            <a:off x="454192" y="4588831"/>
+            <a:off x="321672" y="4588831"/>
             <a:ext cx="891591" cy="369332"/>
           </a:xfrm>
           <a:prstGeom prst="rect">
@@ -9670,6 +9601,45 @@
           <a:p>
             <a:pPr algn="ctr"/>
             <a:endParaRPr lang="en-US"/>
+          </a:p>
+        </p:txBody>
+      </p:sp>
+      <p:sp>
+        <p:nvSpPr>
+          <p:cNvPr id="14" name="TextBox 13">
+            <a:extLst>
+              <a:ext uri="{FF2B5EF4-FFF2-40B4-BE49-F238E27FC236}">
+                <a16:creationId xmlns:a16="http://schemas.microsoft.com/office/drawing/2014/main" id="{D6E6AF59-C470-7512-5D7B-CCA697BE1839}"/>
+              </a:ext>
+            </a:extLst>
+          </p:cNvPr>
+          <p:cNvSpPr txBox="1"/>
+          <p:nvPr/>
+        </p:nvSpPr>
+        <p:spPr>
+          <a:xfrm>
+            <a:off x="230550" y="1126978"/>
+            <a:ext cx="1297150" cy="369332"/>
+          </a:xfrm>
+          <a:prstGeom prst="rect">
+            <a:avLst/>
+          </a:prstGeom>
+          <a:noFill/>
+        </p:spPr>
+        <p:txBody>
+          <a:bodyPr wrap="none" rtlCol="0">
+            <a:spAutoFit/>
+          </a:bodyPr>
+          <a:lstStyle/>
+          <a:p>
+            <a:r>
+              <a:rPr lang="en-US" dirty="0" err="1"/>
+              <a:t>main.head</a:t>
+            </a:r>
+            <a:r>
+              <a:rPr lang="en-US" dirty="0"/>
+              <a:t>: </a:t>
+            </a:r>
           </a:p>
         </p:txBody>
       </p:sp>
@@ -10307,7 +10277,7 @@
         <p:spPr>
           <a:xfrm>
             <a:off x="652756" y="1254612"/>
-            <a:ext cx="7396911" cy="4401205"/>
+            <a:ext cx="7396911" cy="4124206"/>
           </a:xfrm>
           <a:prstGeom prst="rect">
             <a:avLst/>
@@ -10347,27 +10317,7 @@
                 <a:latin typeface="Consolas"/>
                 <a:cs typeface="Consolas"/>
               </a:rPr>
-              <a:t> from linked list; modify the head pointer pointed to by </a:t>
-            </a:r>
-            <a:r>
-              <a:rPr lang="en-US" altLang="zh-CN" dirty="0" err="1">
-                <a:solidFill>
-                  <a:srgbClr val="0000FF"/>
-                </a:solidFill>
-                <a:latin typeface="Consolas"/>
-                <a:cs typeface="Consolas"/>
-              </a:rPr>
-              <a:t>headp</a:t>
-            </a:r>
-            <a:r>
-              <a:rPr lang="en-US" altLang="zh-CN" dirty="0">
-                <a:solidFill>
-                  <a:srgbClr val="0000FF"/>
-                </a:solidFill>
-                <a:latin typeface="Consolas"/>
-                <a:cs typeface="Consolas"/>
-              </a:rPr>
-              <a:t> if needed </a:t>
+              <a:t> from linked list</a:t>
             </a:r>
           </a:p>
           <a:p>
@@ -10376,21 +10326,7 @@
                 <a:latin typeface="Consolas"/>
                 <a:cs typeface="Consolas"/>
               </a:rPr>
-              <a:t>void remove(node **</a:t>
-            </a:r>
-            <a:r>
-              <a:rPr lang="en-US" altLang="zh-CN" sz="2000" dirty="0" err="1">
-                <a:latin typeface="Consolas"/>
-                <a:cs typeface="Consolas"/>
-              </a:rPr>
-              <a:t>headp</a:t>
-            </a:r>
-            <a:r>
-              <a:rPr lang="en-US" altLang="zh-CN" sz="2000" dirty="0">
-                <a:latin typeface="Consolas"/>
-                <a:cs typeface="Consolas"/>
-              </a:rPr>
-              <a:t>, int </a:t>
+              <a:t>void remove(node *head , int </a:t>
             </a:r>
             <a:r>
               <a:rPr lang="en-US" altLang="zh-CN" sz="2000" dirty="0" err="1">
@@ -10538,7 +10474,7 @@
                 <a:latin typeface="Consolas"/>
                 <a:cs typeface="Consolas"/>
               </a:rPr>
-              <a:t>    head = insert(head, </a:t>
+              <a:t>    insert(&amp;head, </a:t>
             </a:r>
             <a:r>
               <a:rPr lang="en-US" altLang="zh-CN" sz="2000" dirty="0" err="1">
@@ -10562,7 +10498,7 @@
                 <a:latin typeface="Consolas"/>
                 <a:cs typeface="Consolas"/>
               </a:rPr>
-              <a:t> head = remove(head, 1);</a:t>
+              <a:t> remove(head , 1);</a:t>
             </a:r>
           </a:p>
           <a:p>
@@ -10579,6 +10515,91 @@
               <a:latin typeface="Consolas"/>
               <a:cs typeface="Consolas"/>
             </a:endParaRPr>
+          </a:p>
+        </p:txBody>
+      </p:sp>
+      <p:sp>
+        <p:nvSpPr>
+          <p:cNvPr id="3" name="TextBox 2">
+            <a:extLst>
+              <a:ext uri="{FF2B5EF4-FFF2-40B4-BE49-F238E27FC236}">
+                <a16:creationId xmlns:a16="http://schemas.microsoft.com/office/drawing/2014/main" id="{50E1A2BD-9A27-0797-7F7D-E354814F0066}"/>
+              </a:ext>
+            </a:extLst>
+          </p:cNvPr>
+          <p:cNvSpPr txBox="1"/>
+          <p:nvPr/>
+        </p:nvSpPr>
+        <p:spPr>
+          <a:xfrm>
+            <a:off x="2267797" y="4305392"/>
+            <a:ext cx="788036" cy="400110"/>
+          </a:xfrm>
+          <a:prstGeom prst="rect">
+            <a:avLst/>
+          </a:prstGeom>
+          <a:solidFill>
+            <a:srgbClr val="FFFF00"/>
+          </a:solidFill>
+          <a:ln>
+            <a:noFill/>
+          </a:ln>
+        </p:spPr>
+        <p:txBody>
+          <a:bodyPr wrap="none" rIns="0" rtlCol="0">
+            <a:spAutoFit/>
+          </a:bodyPr>
+          <a:lstStyle/>
+          <a:p>
+            <a:r>
+              <a:rPr lang="en-US" sz="2000" dirty="0"/>
+              <a:t>&amp;head</a:t>
+            </a:r>
+          </a:p>
+        </p:txBody>
+      </p:sp>
+      <p:sp>
+        <p:nvSpPr>
+          <p:cNvPr id="5" name="TextBox 4">
+            <a:extLst>
+              <a:ext uri="{FF2B5EF4-FFF2-40B4-BE49-F238E27FC236}">
+                <a16:creationId xmlns:a16="http://schemas.microsoft.com/office/drawing/2014/main" id="{65451963-A61A-FB8C-3AB7-3AA3769F64DD}"/>
+              </a:ext>
+            </a:extLst>
+          </p:cNvPr>
+          <p:cNvSpPr txBox="1"/>
+          <p:nvPr/>
+        </p:nvSpPr>
+        <p:spPr>
+          <a:xfrm>
+            <a:off x="2392245" y="1554241"/>
+            <a:ext cx="1594347" cy="400110"/>
+          </a:xfrm>
+          <a:prstGeom prst="rect">
+            <a:avLst/>
+          </a:prstGeom>
+          <a:solidFill>
+            <a:srgbClr val="FFFF00"/>
+          </a:solidFill>
+          <a:ln>
+            <a:noFill/>
+          </a:ln>
+        </p:spPr>
+        <p:txBody>
+          <a:bodyPr wrap="none" rIns="0" rtlCol="0">
+            <a:spAutoFit/>
+          </a:bodyPr>
+          <a:lstStyle/>
+          <a:p>
+            <a:r>
+              <a:rPr lang="en-US" sz="2000" dirty="0"/>
+              <a:t>node **</a:t>
+            </a:r>
+            <a:r>
+              <a:rPr lang="en-US" sz="2000" dirty="0" err="1"/>
+              <a:t>headp</a:t>
+            </a:r>
+            <a:endParaRPr lang="en-US" sz="2000" dirty="0"/>
           </a:p>
         </p:txBody>
       </p:sp>
@@ -10592,6 +10613,130 @@
   <p:clrMapOvr>
     <a:masterClrMapping/>
   </p:clrMapOvr>
+  <p:timing>
+    <p:tnLst>
+      <p:par>
+        <p:cTn id="1" dur="indefinite" restart="never" nodeType="tmRoot">
+          <p:childTnLst>
+            <p:seq concurrent="1" nextAc="seek">
+              <p:cTn id="2" dur="indefinite" nodeType="mainSeq">
+                <p:childTnLst>
+                  <p:par>
+                    <p:cTn id="3" fill="hold">
+                      <p:stCondLst>
+                        <p:cond delay="indefinite"/>
+                      </p:stCondLst>
+                      <p:childTnLst>
+                        <p:par>
+                          <p:cTn id="4" fill="hold">
+                            <p:stCondLst>
+                              <p:cond delay="0"/>
+                            </p:stCondLst>
+                            <p:childTnLst>
+                              <p:par>
+                                <p:cTn id="5" presetID="1" presetClass="entr" presetSubtype="0" fill="hold" grpId="0" nodeType="clickEffect">
+                                  <p:stCondLst>
+                                    <p:cond delay="0"/>
+                                  </p:stCondLst>
+                                  <p:childTnLst>
+                                    <p:set>
+                                      <p:cBhvr>
+                                        <p:cTn id="6" dur="1" fill="hold">
+                                          <p:stCondLst>
+                                            <p:cond delay="0"/>
+                                          </p:stCondLst>
+                                        </p:cTn>
+                                        <p:tgtEl>
+                                          <p:spTgt spid="3"/>
+                                        </p:tgtEl>
+                                        <p:attrNameLst>
+                                          <p:attrName>style.visibility</p:attrName>
+                                        </p:attrNameLst>
+                                      </p:cBhvr>
+                                      <p:to>
+                                        <p:strVal val="visible"/>
+                                      </p:to>
+                                    </p:set>
+                                  </p:childTnLst>
+                                </p:cTn>
+                              </p:par>
+                            </p:childTnLst>
+                          </p:cTn>
+                        </p:par>
+                      </p:childTnLst>
+                    </p:cTn>
+                  </p:par>
+                  <p:par>
+                    <p:cTn id="7" fill="hold">
+                      <p:stCondLst>
+                        <p:cond delay="indefinite"/>
+                      </p:stCondLst>
+                      <p:childTnLst>
+                        <p:par>
+                          <p:cTn id="8" fill="hold">
+                            <p:stCondLst>
+                              <p:cond delay="0"/>
+                            </p:stCondLst>
+                            <p:childTnLst>
+                              <p:par>
+                                <p:cTn id="9" presetID="1" presetClass="entr" presetSubtype="0" fill="hold" grpId="0" nodeType="clickEffect">
+                                  <p:stCondLst>
+                                    <p:cond delay="0"/>
+                                  </p:stCondLst>
+                                  <p:childTnLst>
+                                    <p:set>
+                                      <p:cBhvr>
+                                        <p:cTn id="10" dur="1" fill="hold">
+                                          <p:stCondLst>
+                                            <p:cond delay="0"/>
+                                          </p:stCondLst>
+                                        </p:cTn>
+                                        <p:tgtEl>
+                                          <p:spTgt spid="5"/>
+                                        </p:tgtEl>
+                                        <p:attrNameLst>
+                                          <p:attrName>style.visibility</p:attrName>
+                                        </p:attrNameLst>
+                                      </p:cBhvr>
+                                      <p:to>
+                                        <p:strVal val="visible"/>
+                                      </p:to>
+                                    </p:set>
+                                  </p:childTnLst>
+                                </p:cTn>
+                              </p:par>
+                            </p:childTnLst>
+                          </p:cTn>
+                        </p:par>
+                      </p:childTnLst>
+                    </p:cTn>
+                  </p:par>
+                </p:childTnLst>
+              </p:cTn>
+              <p:prevCondLst>
+                <p:cond evt="onPrev" delay="0">
+                  <p:tgtEl>
+                    <p:sldTgt/>
+                  </p:tgtEl>
+                </p:cond>
+              </p:prevCondLst>
+              <p:nextCondLst>
+                <p:cond evt="onNext" delay="0">
+                  <p:tgtEl>
+                    <p:sldTgt/>
+                  </p:tgtEl>
+                </p:cond>
+              </p:nextCondLst>
+            </p:seq>
+          </p:childTnLst>
+        </p:cTn>
+      </p:par>
+    </p:tnLst>
+    <p:bldLst>
+      <p:bldP spid="3" grpId="0" animBg="1"/>
+      <p:bldP spid="5" grpId="0" animBg="1"/>
+    </p:bldLst>
+  </p:timing>
 </p:sld>
 </file>
 
@@ -11206,7 +11351,7 @@
               <a:rPr lang="en-US" dirty="0">
                 <a:latin typeface="Consolas" panose="020B0609020204030204" pitchFamily="49" charset="0"/>
               </a:rPr>
-              <a:t>(head, </a:t>
+              <a:t>(*head, </a:t>
             </a:r>
             <a:r>
               <a:rPr lang="en-US" dirty="0" err="1">
@@ -11545,8 +11690,8 @@
         </p:nvSpPr>
         <p:spPr>
           <a:xfrm>
-            <a:off x="766168" y="2924419"/>
-            <a:ext cx="891591" cy="369332"/>
+            <a:off x="446206" y="2897388"/>
+            <a:ext cx="1013419" cy="369332"/>
           </a:xfrm>
           <a:prstGeom prst="rect">
             <a:avLst/>
@@ -11561,7 +11706,7 @@
           <a:p>
             <a:r>
               <a:rPr lang="en-US" dirty="0" err="1"/>
-              <a:t>headp</a:t>
+              <a:t>headpp</a:t>
             </a:r>
             <a:r>
               <a:rPr lang="en-US" dirty="0"/>
@@ -11860,6 +12005,45 @@
           <a:p>
             <a:pPr algn="ctr"/>
             <a:endParaRPr lang="en-US"/>
+          </a:p>
+        </p:txBody>
+      </p:sp>
+      <p:sp>
+        <p:nvSpPr>
+          <p:cNvPr id="20" name="TextBox 19">
+            <a:extLst>
+              <a:ext uri="{FF2B5EF4-FFF2-40B4-BE49-F238E27FC236}">
+                <a16:creationId xmlns:a16="http://schemas.microsoft.com/office/drawing/2014/main" id="{0BC562E4-9456-E6F6-F903-2D8C67764AD5}"/>
+              </a:ext>
+            </a:extLst>
+          </p:cNvPr>
+          <p:cNvSpPr txBox="1"/>
+          <p:nvPr/>
+        </p:nvSpPr>
+        <p:spPr>
+          <a:xfrm>
+            <a:off x="120374" y="1199376"/>
+            <a:ext cx="1418978" cy="369332"/>
+          </a:xfrm>
+          <a:prstGeom prst="rect">
+            <a:avLst/>
+          </a:prstGeom>
+          <a:noFill/>
+        </p:spPr>
+        <p:txBody>
+          <a:bodyPr wrap="none" rtlCol="0">
+            <a:spAutoFit/>
+          </a:bodyPr>
+          <a:lstStyle/>
+          <a:p>
+            <a:r>
+              <a:rPr lang="en-US" dirty="0" err="1"/>
+              <a:t>main.headp</a:t>
+            </a:r>
+            <a:r>
+              <a:rPr lang="en-US" dirty="0"/>
+              <a:t>: </a:t>
+            </a:r>
           </a:p>
         </p:txBody>
       </p:sp>
@@ -13039,7 +13223,15 @@
           <a:p>
             <a:r>
               <a:rPr lang="en-US" dirty="0"/>
-              <a:t>    n = find(head, </a:t>
+              <a:t>    n = find(*</a:t>
+            </a:r>
+            <a:r>
+              <a:rPr lang="en-US" dirty="0" err="1"/>
+              <a:t>headp</a:t>
+            </a:r>
+            <a:r>
+              <a:rPr lang="en-US" dirty="0"/>
+              <a:t>, </a:t>
             </a:r>
             <a:r>
               <a:rPr lang="en-US" dirty="0" err="1"/>
@@ -13055,15 +13247,7 @@
                   <a:srgbClr val="0432FF"/>
                 </a:solidFill>
               </a:rPr>
-              <a:t>&amp;</a:t>
-            </a:r>
-            <a:r>
-              <a:rPr lang="en-US" dirty="0" err="1">
-                <a:solidFill>
-                  <a:srgbClr val="0432FF"/>
-                </a:solidFill>
-              </a:rPr>
-              <a:t>pred</a:t>
+              <a:t>&amp;pred</a:t>
             </a:r>
             <a:r>
               <a:rPr lang="en-US" dirty="0"/>
@@ -13556,7 +13740,15 @@
           <a:p>
             <a:r>
               <a:rPr lang="en-US" dirty="0"/>
-              <a:t>    n = find(head, </a:t>
+              <a:t>    n = find(*</a:t>
+            </a:r>
+            <a:r>
+              <a:rPr lang="en-US" dirty="0" err="1"/>
+              <a:t>headp</a:t>
+            </a:r>
+            <a:r>
+              <a:rPr lang="en-US" dirty="0"/>
+              <a:t>, </a:t>
             </a:r>
             <a:r>
               <a:rPr lang="en-US" dirty="0" err="1"/>
@@ -13564,15 +13756,7 @@
             </a:r>
             <a:r>
               <a:rPr lang="en-US" dirty="0"/>
-              <a:t>, &amp;</a:t>
-            </a:r>
-            <a:r>
-              <a:rPr lang="en-US" dirty="0" err="1"/>
-              <a:t>pred</a:t>
-            </a:r>
-            <a:r>
-              <a:rPr lang="en-US" dirty="0"/>
-              <a:t>);</a:t>
+              <a:t>, &amp;pred);</a:t>
             </a:r>
           </a:p>
           <a:p>
@@ -15385,7 +15569,7 @@
             </a:ln>
             <a:extLst>
               <a:ext uri="{909E8E84-426E-40dd-AFC4-6F175D3DCCD1}">
-                <a14:hiddenFill xmlns="" xmlns:a14="http://schemas.microsoft.com/office/drawing/2010/main">
+                <a14:hiddenFill xmlns:a14="http://schemas.microsoft.com/office/drawing/2010/main" xmlns="">
                   <a:noFill/>
                 </a14:hiddenFill>
               </a:ext>
@@ -15419,14 +15603,14 @@
             </a:ln>
             <a:extLst>
               <a:ext uri="{909E8E84-426E-40dd-AFC4-6F175D3DCCD1}">
-                <a14:hiddenFill xmlns="" xmlns:a14="http://schemas.microsoft.com/office/drawing/2010/main">
+                <a14:hiddenFill xmlns:a14="http://schemas.microsoft.com/office/drawing/2010/main" xmlns="">
                   <a:solidFill>
                     <a:srgbClr val="FFFFFF"/>
                   </a:solidFill>
                 </a14:hiddenFill>
               </a:ext>
               <a:ext uri="{91240B29-F687-4f45-9708-019B960494DF}">
-                <a14:hiddenLine xmlns="" xmlns:a14="http://schemas.microsoft.com/office/drawing/2010/main" w="9525">
+                <a14:hiddenLine xmlns:a14="http://schemas.microsoft.com/office/drawing/2010/main" xmlns="" w="9525">
                   <a:solidFill>
                     <a:srgbClr val="000000"/>
                   </a:solidFill>
@@ -15689,7 +15873,7 @@
             </a:ln>
             <a:extLst>
               <a:ext uri="{909E8E84-426E-40dd-AFC4-6F175D3DCCD1}">
-                <a14:hiddenFill xmlns="" xmlns:a14="http://schemas.microsoft.com/office/drawing/2010/main">
+                <a14:hiddenFill xmlns:a14="http://schemas.microsoft.com/office/drawing/2010/main" xmlns="">
                   <a:noFill/>
                 </a14:hiddenFill>
               </a:ext>
@@ -15729,14 +15913,14 @@
             </a:ln>
             <a:extLst>
               <a:ext uri="{909E8E84-426E-40dd-AFC4-6F175D3DCCD1}">
-                <a14:hiddenFill xmlns="" xmlns:a14="http://schemas.microsoft.com/office/drawing/2010/main">
+                <a14:hiddenFill xmlns:a14="http://schemas.microsoft.com/office/drawing/2010/main" xmlns="">
                   <a:solidFill>
                     <a:srgbClr val="FFFFFF"/>
                   </a:solidFill>
                 </a14:hiddenFill>
               </a:ext>
               <a:ext uri="{91240B29-F687-4f45-9708-019B960494DF}">
-                <a14:hiddenLine xmlns="" xmlns:a14="http://schemas.microsoft.com/office/drawing/2010/main" w="9525">
+                <a14:hiddenLine xmlns:a14="http://schemas.microsoft.com/office/drawing/2010/main" xmlns="" w="9525">
                   <a:solidFill>
                     <a:srgbClr val="000000"/>
                   </a:solidFill>
@@ -15978,7 +16162,7 @@
             </a:ln>
             <a:extLst>
               <a:ext uri="{909E8E84-426E-40dd-AFC4-6F175D3DCCD1}">
-                <a14:hiddenFill xmlns="" xmlns:a14="http://schemas.microsoft.com/office/drawing/2010/main">
+                <a14:hiddenFill xmlns:a14="http://schemas.microsoft.com/office/drawing/2010/main" xmlns="">
                   <a:noFill/>
                 </a14:hiddenFill>
               </a:ext>
@@ -18376,6 +18560,12 @@
 </file>
 
 <file path=customXml/item1.xml><?xml version="1.0" encoding="utf-8"?>
+<p:properties xmlns:p="http://schemas.microsoft.com/office/2006/metadata/properties" xmlns:xsi="http://www.w3.org/2001/XMLSchema-instance" xmlns:pc="http://schemas.microsoft.com/office/infopath/2007/PartnerControls">
+  <documentManagement/>
+</p:properties>
+</file>
+
+<file path=customXml/item2.xml><?xml version="1.0" encoding="utf-8"?>
 <ct:contentTypeSchema xmlns:ct="http://schemas.microsoft.com/office/2006/metadata/contentType" xmlns:ma="http://schemas.microsoft.com/office/2006/metadata/properties/metaAttributes" ct:_="" ma:_="" ma:contentTypeName="Document" ma:contentTypeID="0x010100F230F55FC4E86843A38ABC983CBD33D2" ma:contentTypeVersion="2" ma:contentTypeDescription="Create a new document." ma:contentTypeScope="" ma:versionID="ea51d48ed41b66d32eb63de817eecbcd">
   <xsd:schema xmlns:xsd="http://www.w3.org/2001/XMLSchema" xmlns:xs="http://www.w3.org/2001/XMLSchema" xmlns:p="http://schemas.microsoft.com/office/2006/metadata/properties" xmlns:ns3="74d6482f-e53c-4fa7-ac87-951f9f66bd4c" targetNamespace="http://schemas.microsoft.com/office/2006/metadata/properties" ma:root="true" ma:fieldsID="128b5480a780b9585a060f8329b1fff7" ns3:_="">
     <xsd:import namespace="74d6482f-e53c-4fa7-ac87-951f9f66bd4c"/>
@@ -18507,12 +18697,6 @@
 </ct:contentTypeSchema>
 </file>
 
-<file path=customXml/item2.xml><?xml version="1.0" encoding="utf-8"?>
-<p:properties xmlns:p="http://schemas.microsoft.com/office/2006/metadata/properties" xmlns:xsi="http://www.w3.org/2001/XMLSchema-instance" xmlns:pc="http://schemas.microsoft.com/office/infopath/2007/PartnerControls">
-  <documentManagement/>
-</p:properties>
-</file>
-
 <file path=customXml/item3.xml><?xml version="1.0" encoding="utf-8"?>
 <?mso-contentType ?>
 <FormTemplates xmlns="http://schemas.microsoft.com/sharepoint/v3/contenttype/forms">
@@ -18523,6 +18707,22 @@
 </file>
 
 <file path=customXml/itemProps1.xml><?xml version="1.0" encoding="utf-8"?>
+<ds:datastoreItem xmlns:ds="http://schemas.openxmlformats.org/officeDocument/2006/customXml" ds:itemID="{908B740D-AB21-43E0-B1F8-69FB41A97CFE}">
+  <ds:schemaRefs>
+    <ds:schemaRef ds:uri="http://schemas.microsoft.com/office/infopath/2007/PartnerControls"/>
+    <ds:schemaRef ds:uri="http://schemas.microsoft.com/office/2006/metadata/properties"/>
+    <ds:schemaRef ds:uri="http://purl.org/dc/dcmitype/"/>
+    <ds:schemaRef ds:uri="http://purl.org/dc/terms/"/>
+    <ds:schemaRef ds:uri="http://schemas.openxmlformats.org/package/2006/metadata/core-properties"/>
+    <ds:schemaRef ds:uri="http://www.w3.org/XML/1998/namespace"/>
+    <ds:schemaRef ds:uri="http://schemas.microsoft.com/office/2006/documentManagement/types"/>
+    <ds:schemaRef ds:uri="74d6482f-e53c-4fa7-ac87-951f9f66bd4c"/>
+    <ds:schemaRef ds:uri="http://purl.org/dc/elements/1.1/"/>
+  </ds:schemaRefs>
+</ds:datastoreItem>
+</file>
+
+<file path=customXml/itemProps2.xml><?xml version="1.0" encoding="utf-8"?>
 <ds:datastoreItem xmlns:ds="http://schemas.openxmlformats.org/officeDocument/2006/customXml" ds:itemID="{B1227868-FD94-4122-B90C-2FB375A0A8E0}">
   <ds:schemaRefs>
     <ds:schemaRef ds:uri="http://schemas.microsoft.com/office/2006/metadata/contentType"/>
@@ -18541,22 +18741,6 @@
 </ds:datastoreItem>
 </file>
 
-<file path=customXml/itemProps2.xml><?xml version="1.0" encoding="utf-8"?>
-<ds:datastoreItem xmlns:ds="http://schemas.openxmlformats.org/officeDocument/2006/customXml" ds:itemID="{908B740D-AB21-43E0-B1F8-69FB41A97CFE}">
-  <ds:schemaRefs>
-    <ds:schemaRef ds:uri="http://schemas.microsoft.com/office/2006/documentManagement/types"/>
-    <ds:schemaRef ds:uri="http://schemas.microsoft.com/office/2006/metadata/properties"/>
-    <ds:schemaRef ds:uri="http://purl.org/dc/dcmitype/"/>
-    <ds:schemaRef ds:uri="http://www.w3.org/XML/1998/namespace"/>
-    <ds:schemaRef ds:uri="74d6482f-e53c-4fa7-ac87-951f9f66bd4c"/>
-    <ds:schemaRef ds:uri="http://purl.org/dc/terms/"/>
-    <ds:schemaRef ds:uri="http://schemas.microsoft.com/office/infopath/2007/PartnerControls"/>
-    <ds:schemaRef ds:uri="http://schemas.openxmlformats.org/package/2006/metadata/core-properties"/>
-    <ds:schemaRef ds:uri="http://purl.org/dc/elements/1.1/"/>
-  </ds:schemaRefs>
-</ds:datastoreItem>
-</file>
-
 <file path=customXml/itemProps3.xml><?xml version="1.0" encoding="utf-8"?>
 <ds:datastoreItem xmlns:ds="http://schemas.openxmlformats.org/officeDocument/2006/customXml" ds:itemID="{7952D454-F99B-4B98-8368-72489BAA5CBE}">
   <ds:schemaRefs>
